--- a/slides/modules/m20-serverless-zero-to-hero.pptx
+++ b/slides/modules/m20-serverless-zero-to-hero.pptx
@@ -13,6 +13,7 @@
     <p:sldId id="261" r:id="rId13"/>
     <p:sldId id="262" r:id="rId14"/>
     <p:sldId id="263" r:id="rId15"/>
+    <p:sldId id="264" r:id="rId16"/>
   </p:sldIdLst>
   <p:sldSz cx="12191695" cy="6858000" type="screen4x3"/>
   <p:notesSz cx="6858000" cy="9144000"/>
@@ -930,6 +931,76 @@
           <a:p>
             <a:r>
               <a:t>Close on the decision and the transfer, because the honest answer is "it depends" and here's the checklist. Lean serverless when a service is bursty or spiky, idle a meaningful fraction of the time, request- or event-driven, and tolerant of an occasional cold start (or cheap enough to keep one warm) — that's when scale-to-zero and pay-for-use earn their keep. Lean Deployment when a service is steadily busy (a plain Deployment with an HPA is simpler and has no cold start), when a latency-critical path can't tolerate a cold start and isn't worth a warm floor, or when the workload is long-running or stateful (serverless is for short, stateless request handling — batch and stateful work are other modules). On rollout, Knative gives you canary and rollback as a Route weight over revisions; a plain Deployment gives you rolling updates, or Argo Rollouts for metric-gated promotion. Functions via kn func are a ksvc from a code template — presented here as concept and instructor demo, because the cockpit has no local container build and the on-cluster path needs Pipelines. Then take the questions back to your org: which of your services sit idle a meaningful part of the day, and what do the always-on pods cost? When you say "cold start," is it a number or a fear? Can you canary and roll back without a redeploy? And where do your event-driven flows live today? The eventing depth and real workflows are the next module.</a:t>
+            </a:r>
+          </a:p>
+        </p:txBody>
+      </p:sp>
+      <p:sp>
+        <p:nvSpPr>
+          <p:cNvPr id="4" name="Slide Number Placeholder 3"/>
+          <p:cNvSpPr>
+            <a:spLocks noGrp="1"/>
+          </p:cNvSpPr>
+          <p:nvPr>
+            <p:ph type="sldNum" idx="5" sz="quarter"/>
+          </p:nvPr>
+        </p:nvSpPr>
+        <p:spPr/>
+      </p:sp>
+    </p:spTree>
+  </p:cSld>
+  <p:clrMapOvr>
+    <a:masterClrMapping/>
+  </p:clrMapOvr>
+</p:notes>
+</file>
+
+<file path=ppt/notesSlides/notesSlide8.xml><?xml version="1.0" encoding="utf-8"?>
+<p:notes xmlns:a="http://schemas.openxmlformats.org/drawingml/2006/main" xmlns:p="http://schemas.openxmlformats.org/presentationml/2006/main" xmlns:r="http://schemas.openxmlformats.org/officeDocument/2006/relationships">
+  <p:cSld>
+    <p:spTree>
+      <p:nvGrpSpPr>
+        <p:cNvPr id="1" name=""/>
+        <p:cNvGrpSpPr/>
+        <p:nvPr/>
+      </p:nvGrpSpPr>
+      <p:grpSpPr>
+        <a:xfrm>
+          <a:off x="0" y="0"/>
+          <a:ext cx="0" cy="0"/>
+          <a:chOff x="0" y="0"/>
+          <a:chExt cx="0" cy="0"/>
+        </a:xfrm>
+      </p:grpSpPr>
+      <p:sp>
+        <p:nvSpPr>
+          <p:cNvPr id="2" name="Slide Image Placeholder 1"/>
+          <p:cNvSpPr>
+            <a:spLocks noGrp="1"/>
+          </p:cNvSpPr>
+          <p:nvPr>
+            <p:ph type="sldImg" idx="2"/>
+          </p:nvPr>
+        </p:nvSpPr>
+        <p:spPr/>
+      </p:sp>
+      <p:sp>
+        <p:nvSpPr>
+          <p:cNvPr id="3" name="Notes Placeholder 2"/>
+          <p:cNvSpPr>
+            <a:spLocks noGrp="1"/>
+          </p:cNvSpPr>
+          <p:nvPr>
+            <p:ph type="body" idx="3" sz="quarter"/>
+          </p:nvPr>
+        </p:nvSpPr>
+        <p:spPr/>
+        <p:txBody>
+          <a:bodyPr/>
+          <a:lstStyle/>
+          <a:p>
+            <a:r>
+              <a:t>Concept diagram: What you built.</a:t>
             </a:r>
           </a:p>
         </p:txBody>
@@ -4352,11 +4423,11 @@
         <p:spPr>
           <a:xfrm>
             <a:off x="841248" y="2670048"/>
-            <a:ext cx="5715000" cy="530352"/>
+            <a:ext cx="5138928" cy="786384"/>
           </a:xfrm>
           <a:prstGeom prst="roundRect">
             <a:avLst>
-              <a:gd name="adj" fmla="val 6000"/>
+              <a:gd name="adj" fmla="val 7000"/>
             </a:avLst>
           </a:prstGeom>
           <a:solidFill>
@@ -4391,9 +4462,55 @@
           </a:p>
         </p:txBody>
       </p:sp>
+      <p:sp>
+        <p:nvSpPr>
+          <p:cNvPr id="8" name="Rounded Rectangle 7"/>
+          <p:cNvSpPr/>
+          <p:nvPr/>
+        </p:nvSpPr>
+        <p:spPr>
+          <a:xfrm>
+            <a:off x="987552" y="2807208"/>
+            <a:ext cx="512064" cy="512064"/>
+          </a:xfrm>
+          <a:prstGeom prst="roundRect">
+            <a:avLst>
+              <a:gd name="adj" fmla="val 26000"/>
+            </a:avLst>
+          </a:prstGeom>
+          <a:solidFill>
+            <a:srgbClr val="EE0000"/>
+          </a:solidFill>
+          <a:ln>
+            <a:noFill/>
+          </a:ln>
+          <a:effectLst/>
+        </p:spPr>
+        <p:style>
+          <a:lnRef idx="1">
+            <a:schemeClr val="accent1"/>
+          </a:lnRef>
+          <a:fillRef idx="3">
+            <a:schemeClr val="accent1"/>
+          </a:fillRef>
+          <a:effectRef idx="2">
+            <a:schemeClr val="accent1"/>
+          </a:effectRef>
+          <a:fontRef idx="minor">
+            <a:schemeClr val="lt1"/>
+          </a:fontRef>
+        </p:style>
+        <p:txBody>
+          <a:bodyPr rtlCol="0" anchor="ctr"/>
+          <a:lstStyle/>
+          <a:p>
+            <a:pPr algn="ctr"/>
+          </a:p>
+        </p:txBody>
+      </p:sp>
       <p:pic>
         <p:nvPicPr>
-          <p:cNvPr id="8" name="Picture 7" descr="check_steel.png"/>
+          <p:cNvPr id="9" name="Picture 8" descr="check_white.png"/>
           <p:cNvPicPr>
             <a:picLocks noChangeAspect="1"/>
           </p:cNvPicPr>
@@ -4407,8 +4524,8 @@
         </p:blipFill>
         <p:spPr>
           <a:xfrm>
-            <a:off x="987552" y="2816352"/>
-            <a:ext cx="237744" cy="237744"/>
+            <a:off x="1110447" y="2930103"/>
+            <a:ext cx="266273" cy="266273"/>
           </a:xfrm>
           <a:prstGeom prst="rect">
             <a:avLst/>
@@ -4417,14 +4534,14 @@
       </p:pic>
       <p:sp>
         <p:nvSpPr>
-          <p:cNvPr id="9" name="TextBox 8"/>
+          <p:cNvPr id="10" name="TextBox 9"/>
           <p:cNvSpPr txBox="1"/>
           <p:nvPr/>
         </p:nvSpPr>
         <p:spPr>
           <a:xfrm>
-            <a:off x="1353312" y="2670048"/>
-            <a:ext cx="5029200" cy="530352"/>
+            <a:off x="1627632" y="2670048"/>
+            <a:ext cx="4206240" cy="786384"/>
           </a:xfrm>
           <a:prstGeom prst="rect">
             <a:avLst/>
@@ -4449,7 +4566,7 @@
               </a:spcAft>
             </a:pPr>
             <a:r>
-              <a:rPr sz="1200" b="0">
+              <a:rPr sz="1150" b="0">
                 <a:solidFill>
                   <a:srgbClr val="1A1A1A"/>
                 </a:solidFill>
@@ -4462,18 +4579,18 @@
       </p:sp>
       <p:sp>
         <p:nvSpPr>
-          <p:cNvPr id="10" name="Rounded Rectangle 9"/>
+          <p:cNvPr id="11" name="Rounded Rectangle 10"/>
           <p:cNvSpPr/>
           <p:nvPr/>
         </p:nvSpPr>
         <p:spPr>
           <a:xfrm>
-            <a:off x="841248" y="3273552"/>
-            <a:ext cx="5715000" cy="530352"/>
+            <a:off x="6254496" y="2670048"/>
+            <a:ext cx="5138928" cy="786384"/>
           </a:xfrm>
           <a:prstGeom prst="roundRect">
             <a:avLst>
-              <a:gd name="adj" fmla="val 6000"/>
+              <a:gd name="adj" fmla="val 7000"/>
             </a:avLst>
           </a:prstGeom>
           <a:solidFill>
@@ -4508,9 +4625,55 @@
           </a:p>
         </p:txBody>
       </p:sp>
+      <p:sp>
+        <p:nvSpPr>
+          <p:cNvPr id="12" name="Rounded Rectangle 11"/>
+          <p:cNvSpPr/>
+          <p:nvPr/>
+        </p:nvSpPr>
+        <p:spPr>
+          <a:xfrm>
+            <a:off x="6400800" y="2807208"/>
+            <a:ext cx="512064" cy="512064"/>
+          </a:xfrm>
+          <a:prstGeom prst="roundRect">
+            <a:avLst>
+              <a:gd name="adj" fmla="val 26000"/>
+            </a:avLst>
+          </a:prstGeom>
+          <a:solidFill>
+            <a:srgbClr val="EE0000"/>
+          </a:solidFill>
+          <a:ln>
+            <a:noFill/>
+          </a:ln>
+          <a:effectLst/>
+        </p:spPr>
+        <p:style>
+          <a:lnRef idx="1">
+            <a:schemeClr val="accent1"/>
+          </a:lnRef>
+          <a:fillRef idx="3">
+            <a:schemeClr val="accent1"/>
+          </a:fillRef>
+          <a:effectRef idx="2">
+            <a:schemeClr val="accent1"/>
+          </a:effectRef>
+          <a:fontRef idx="minor">
+            <a:schemeClr val="lt1"/>
+          </a:fontRef>
+        </p:style>
+        <p:txBody>
+          <a:bodyPr rtlCol="0" anchor="ctr"/>
+          <a:lstStyle/>
+          <a:p>
+            <a:pPr algn="ctr"/>
+          </a:p>
+        </p:txBody>
+      </p:sp>
       <p:pic>
         <p:nvPicPr>
-          <p:cNvPr id="11" name="Picture 10" descr="check_steel.png"/>
+          <p:cNvPr id="13" name="Picture 12" descr="check_white.png"/>
           <p:cNvPicPr>
             <a:picLocks noChangeAspect="1"/>
           </p:cNvPicPr>
@@ -4524,8 +4687,8 @@
         </p:blipFill>
         <p:spPr>
           <a:xfrm>
-            <a:off x="987552" y="3419856"/>
-            <a:ext cx="237744" cy="237744"/>
+            <a:off x="6523695" y="2930103"/>
+            <a:ext cx="266273" cy="266273"/>
           </a:xfrm>
           <a:prstGeom prst="rect">
             <a:avLst/>
@@ -4534,14 +4697,14 @@
       </p:pic>
       <p:sp>
         <p:nvSpPr>
-          <p:cNvPr id="12" name="TextBox 11"/>
+          <p:cNvPr id="14" name="TextBox 13"/>
           <p:cNvSpPr txBox="1"/>
           <p:nvPr/>
         </p:nvSpPr>
         <p:spPr>
           <a:xfrm>
-            <a:off x="1353312" y="3273552"/>
-            <a:ext cx="5029200" cy="530352"/>
+            <a:off x="7040880" y="2670048"/>
+            <a:ext cx="4206240" cy="786384"/>
           </a:xfrm>
           <a:prstGeom prst="rect">
             <a:avLst/>
@@ -4566,7 +4729,7 @@
               </a:spcAft>
             </a:pPr>
             <a:r>
-              <a:rPr sz="1200" b="0">
+              <a:rPr sz="1150" b="0">
                 <a:solidFill>
                   <a:srgbClr val="1A1A1A"/>
                 </a:solidFill>
@@ -4579,18 +4742,18 @@
       </p:sp>
       <p:sp>
         <p:nvSpPr>
-          <p:cNvPr id="13" name="Rounded Rectangle 12"/>
+          <p:cNvPr id="15" name="Rounded Rectangle 14"/>
           <p:cNvSpPr/>
           <p:nvPr/>
         </p:nvSpPr>
         <p:spPr>
           <a:xfrm>
-            <a:off x="841248" y="3877056"/>
-            <a:ext cx="5715000" cy="530352"/>
+            <a:off x="841248" y="3602736"/>
+            <a:ext cx="5138928" cy="786384"/>
           </a:xfrm>
           <a:prstGeom prst="roundRect">
             <a:avLst>
-              <a:gd name="adj" fmla="val 6000"/>
+              <a:gd name="adj" fmla="val 7000"/>
             </a:avLst>
           </a:prstGeom>
           <a:solidFill>
@@ -4625,9 +4788,55 @@
           </a:p>
         </p:txBody>
       </p:sp>
+      <p:sp>
+        <p:nvSpPr>
+          <p:cNvPr id="16" name="Rounded Rectangle 15"/>
+          <p:cNvSpPr/>
+          <p:nvPr/>
+        </p:nvSpPr>
+        <p:spPr>
+          <a:xfrm>
+            <a:off x="987552" y="3739896"/>
+            <a:ext cx="512064" cy="512064"/>
+          </a:xfrm>
+          <a:prstGeom prst="roundRect">
+            <a:avLst>
+              <a:gd name="adj" fmla="val 26000"/>
+            </a:avLst>
+          </a:prstGeom>
+          <a:solidFill>
+            <a:srgbClr val="EE0000"/>
+          </a:solidFill>
+          <a:ln>
+            <a:noFill/>
+          </a:ln>
+          <a:effectLst/>
+        </p:spPr>
+        <p:style>
+          <a:lnRef idx="1">
+            <a:schemeClr val="accent1"/>
+          </a:lnRef>
+          <a:fillRef idx="3">
+            <a:schemeClr val="accent1"/>
+          </a:fillRef>
+          <a:effectRef idx="2">
+            <a:schemeClr val="accent1"/>
+          </a:effectRef>
+          <a:fontRef idx="minor">
+            <a:schemeClr val="lt1"/>
+          </a:fontRef>
+        </p:style>
+        <p:txBody>
+          <a:bodyPr rtlCol="0" anchor="ctr"/>
+          <a:lstStyle/>
+          <a:p>
+            <a:pPr algn="ctr"/>
+          </a:p>
+        </p:txBody>
+      </p:sp>
       <p:pic>
         <p:nvPicPr>
-          <p:cNvPr id="14" name="Picture 13" descr="check_steel.png"/>
+          <p:cNvPr id="17" name="Picture 16" descr="check_white.png"/>
           <p:cNvPicPr>
             <a:picLocks noChangeAspect="1"/>
           </p:cNvPicPr>
@@ -4641,8 +4850,8 @@
         </p:blipFill>
         <p:spPr>
           <a:xfrm>
-            <a:off x="987552" y="4023360"/>
-            <a:ext cx="237744" cy="237744"/>
+            <a:off x="1110447" y="3862791"/>
+            <a:ext cx="266273" cy="266273"/>
           </a:xfrm>
           <a:prstGeom prst="rect">
             <a:avLst/>
@@ -4651,14 +4860,14 @@
       </p:pic>
       <p:sp>
         <p:nvSpPr>
-          <p:cNvPr id="15" name="TextBox 14"/>
+          <p:cNvPr id="18" name="TextBox 17"/>
           <p:cNvSpPr txBox="1"/>
           <p:nvPr/>
         </p:nvSpPr>
         <p:spPr>
           <a:xfrm>
-            <a:off x="1353312" y="3877056"/>
-            <a:ext cx="5029200" cy="530352"/>
+            <a:off x="1627632" y="3602736"/>
+            <a:ext cx="4206240" cy="786384"/>
           </a:xfrm>
           <a:prstGeom prst="rect">
             <a:avLst/>
@@ -4683,7 +4892,7 @@
               </a:spcAft>
             </a:pPr>
             <a:r>
-              <a:rPr sz="1200" b="0">
+              <a:rPr sz="1150" b="0">
                 <a:solidFill>
                   <a:srgbClr val="1A1A1A"/>
                 </a:solidFill>
@@ -4696,18 +4905,18 @@
       </p:sp>
       <p:sp>
         <p:nvSpPr>
-          <p:cNvPr id="16" name="Rounded Rectangle 15"/>
+          <p:cNvPr id="19" name="Rounded Rectangle 18"/>
           <p:cNvSpPr/>
           <p:nvPr/>
         </p:nvSpPr>
         <p:spPr>
           <a:xfrm>
-            <a:off x="841248" y="4480560"/>
-            <a:ext cx="5715000" cy="530352"/>
+            <a:off x="6254496" y="3602736"/>
+            <a:ext cx="5138928" cy="786384"/>
           </a:xfrm>
           <a:prstGeom prst="roundRect">
             <a:avLst>
-              <a:gd name="adj" fmla="val 6000"/>
+              <a:gd name="adj" fmla="val 7000"/>
             </a:avLst>
           </a:prstGeom>
           <a:solidFill>
@@ -4742,9 +4951,55 @@
           </a:p>
         </p:txBody>
       </p:sp>
+      <p:sp>
+        <p:nvSpPr>
+          <p:cNvPr id="20" name="Rounded Rectangle 19"/>
+          <p:cNvSpPr/>
+          <p:nvPr/>
+        </p:nvSpPr>
+        <p:spPr>
+          <a:xfrm>
+            <a:off x="6400800" y="3739896"/>
+            <a:ext cx="512064" cy="512064"/>
+          </a:xfrm>
+          <a:prstGeom prst="roundRect">
+            <a:avLst>
+              <a:gd name="adj" fmla="val 26000"/>
+            </a:avLst>
+          </a:prstGeom>
+          <a:solidFill>
+            <a:srgbClr val="EE0000"/>
+          </a:solidFill>
+          <a:ln>
+            <a:noFill/>
+          </a:ln>
+          <a:effectLst/>
+        </p:spPr>
+        <p:style>
+          <a:lnRef idx="1">
+            <a:schemeClr val="accent1"/>
+          </a:lnRef>
+          <a:fillRef idx="3">
+            <a:schemeClr val="accent1"/>
+          </a:fillRef>
+          <a:effectRef idx="2">
+            <a:schemeClr val="accent1"/>
+          </a:effectRef>
+          <a:fontRef idx="minor">
+            <a:schemeClr val="lt1"/>
+          </a:fontRef>
+        </p:style>
+        <p:txBody>
+          <a:bodyPr rtlCol="0" anchor="ctr"/>
+          <a:lstStyle/>
+          <a:p>
+            <a:pPr algn="ctr"/>
+          </a:p>
+        </p:txBody>
+      </p:sp>
       <p:pic>
         <p:nvPicPr>
-          <p:cNvPr id="17" name="Picture 16" descr="check_steel.png"/>
+          <p:cNvPr id="21" name="Picture 20" descr="check_white.png"/>
           <p:cNvPicPr>
             <a:picLocks noChangeAspect="1"/>
           </p:cNvPicPr>
@@ -4758,8 +5013,8 @@
         </p:blipFill>
         <p:spPr>
           <a:xfrm>
-            <a:off x="987552" y="4626864"/>
-            <a:ext cx="237744" cy="237744"/>
+            <a:off x="6523695" y="3862791"/>
+            <a:ext cx="266273" cy="266273"/>
           </a:xfrm>
           <a:prstGeom prst="rect">
             <a:avLst/>
@@ -4768,14 +5023,14 @@
       </p:pic>
       <p:sp>
         <p:nvSpPr>
-          <p:cNvPr id="18" name="TextBox 17"/>
+          <p:cNvPr id="22" name="TextBox 21"/>
           <p:cNvSpPr txBox="1"/>
           <p:nvPr/>
         </p:nvSpPr>
         <p:spPr>
           <a:xfrm>
-            <a:off x="1353312" y="4480560"/>
-            <a:ext cx="5029200" cy="530352"/>
+            <a:off x="7040880" y="3602736"/>
+            <a:ext cx="4206240" cy="786384"/>
           </a:xfrm>
           <a:prstGeom prst="rect">
             <a:avLst/>
@@ -4800,7 +5055,7 @@
               </a:spcAft>
             </a:pPr>
             <a:r>
-              <a:rPr sz="1200" b="0">
+              <a:rPr sz="1150" b="0">
                 <a:solidFill>
                   <a:srgbClr val="1A1A1A"/>
                 </a:solidFill>
@@ -4813,18 +5068,18 @@
       </p:sp>
       <p:sp>
         <p:nvSpPr>
-          <p:cNvPr id="19" name="Rounded Rectangle 18"/>
+          <p:cNvPr id="23" name="Rounded Rectangle 22"/>
           <p:cNvSpPr/>
           <p:nvPr/>
         </p:nvSpPr>
         <p:spPr>
           <a:xfrm>
-            <a:off x="841248" y="5084064"/>
-            <a:ext cx="5715000" cy="530352"/>
+            <a:off x="841248" y="4535424"/>
+            <a:ext cx="5138928" cy="786384"/>
           </a:xfrm>
           <a:prstGeom prst="roundRect">
             <a:avLst>
-              <a:gd name="adj" fmla="val 6000"/>
+              <a:gd name="adj" fmla="val 7000"/>
             </a:avLst>
           </a:prstGeom>
           <a:solidFill>
@@ -4859,9 +5114,55 @@
           </a:p>
         </p:txBody>
       </p:sp>
+      <p:sp>
+        <p:nvSpPr>
+          <p:cNvPr id="24" name="Rounded Rectangle 23"/>
+          <p:cNvSpPr/>
+          <p:nvPr/>
+        </p:nvSpPr>
+        <p:spPr>
+          <a:xfrm>
+            <a:off x="987552" y="4672584"/>
+            <a:ext cx="512064" cy="512064"/>
+          </a:xfrm>
+          <a:prstGeom prst="roundRect">
+            <a:avLst>
+              <a:gd name="adj" fmla="val 26000"/>
+            </a:avLst>
+          </a:prstGeom>
+          <a:solidFill>
+            <a:srgbClr val="EE0000"/>
+          </a:solidFill>
+          <a:ln>
+            <a:noFill/>
+          </a:ln>
+          <a:effectLst/>
+        </p:spPr>
+        <p:style>
+          <a:lnRef idx="1">
+            <a:schemeClr val="accent1"/>
+          </a:lnRef>
+          <a:fillRef idx="3">
+            <a:schemeClr val="accent1"/>
+          </a:fillRef>
+          <a:effectRef idx="2">
+            <a:schemeClr val="accent1"/>
+          </a:effectRef>
+          <a:fontRef idx="minor">
+            <a:schemeClr val="lt1"/>
+          </a:fontRef>
+        </p:style>
+        <p:txBody>
+          <a:bodyPr rtlCol="0" anchor="ctr"/>
+          <a:lstStyle/>
+          <a:p>
+            <a:pPr algn="ctr"/>
+          </a:p>
+        </p:txBody>
+      </p:sp>
       <p:pic>
         <p:nvPicPr>
-          <p:cNvPr id="20" name="Picture 19" descr="check_steel.png"/>
+          <p:cNvPr id="25" name="Picture 24" descr="check_white.png"/>
           <p:cNvPicPr>
             <a:picLocks noChangeAspect="1"/>
           </p:cNvPicPr>
@@ -4875,8 +5176,8 @@
         </p:blipFill>
         <p:spPr>
           <a:xfrm>
-            <a:off x="987552" y="5230368"/>
-            <a:ext cx="237744" cy="237744"/>
+            <a:off x="1110447" y="4795479"/>
+            <a:ext cx="266273" cy="266273"/>
           </a:xfrm>
           <a:prstGeom prst="rect">
             <a:avLst/>
@@ -4885,14 +5186,14 @@
       </p:pic>
       <p:sp>
         <p:nvSpPr>
-          <p:cNvPr id="21" name="TextBox 20"/>
+          <p:cNvPr id="26" name="TextBox 25"/>
           <p:cNvSpPr txBox="1"/>
           <p:nvPr/>
         </p:nvSpPr>
         <p:spPr>
           <a:xfrm>
-            <a:off x="1353312" y="5084064"/>
-            <a:ext cx="5029200" cy="530352"/>
+            <a:off x="1627632" y="4535424"/>
+            <a:ext cx="4206240" cy="786384"/>
           </a:xfrm>
           <a:prstGeom prst="rect">
             <a:avLst/>
@@ -4917,221 +5218,13 @@
               </a:spcAft>
             </a:pPr>
             <a:r>
-              <a:rPr sz="1200" b="0">
+              <a:rPr sz="1150" b="0">
                 <a:solidFill>
                   <a:srgbClr val="1A1A1A"/>
                 </a:solidFill>
                 <a:latin typeface="Red Hat Text"/>
               </a:rPr>
               <a:t>Pay for requests, not for reserved idle capacity</a:t>
-            </a:r>
-          </a:p>
-        </p:txBody>
-      </p:sp>
-      <p:sp>
-        <p:nvSpPr>
-          <p:cNvPr id="22" name="Rounded Rectangle 21"/>
-          <p:cNvSpPr/>
-          <p:nvPr/>
-        </p:nvSpPr>
-        <p:spPr>
-          <a:xfrm>
-            <a:off x="6812280" y="2670048"/>
-            <a:ext cx="4538167" cy="2944368"/>
-          </a:xfrm>
-          <a:prstGeom prst="roundRect">
-            <a:avLst>
-              <a:gd name="adj" fmla="val 4000"/>
-            </a:avLst>
-          </a:prstGeom>
-          <a:solidFill>
-            <a:srgbClr val="FFFFFF"/>
-          </a:solidFill>
-          <a:ln w="15240">
-            <a:solidFill>
-              <a:srgbClr val="DDE1E6"/>
-            </a:solidFill>
-          </a:ln>
-          <a:effectLst/>
-        </p:spPr>
-        <p:style>
-          <a:lnRef idx="1">
-            <a:schemeClr val="accent1"/>
-          </a:lnRef>
-          <a:fillRef idx="3">
-            <a:schemeClr val="accent1"/>
-          </a:fillRef>
-          <a:effectRef idx="2">
-            <a:schemeClr val="accent1"/>
-          </a:effectRef>
-          <a:fontRef idx="minor">
-            <a:schemeClr val="lt1"/>
-          </a:fontRef>
-        </p:style>
-        <p:txBody>
-          <a:bodyPr rtlCol="0" anchor="ctr"/>
-          <a:lstStyle/>
-          <a:p>
-            <a:pPr algn="ctr"/>
-          </a:p>
-        </p:txBody>
-      </p:sp>
-      <p:sp>
-        <p:nvSpPr>
-          <p:cNvPr id="23" name="Rounded Rectangle 22"/>
-          <p:cNvSpPr/>
-          <p:nvPr/>
-        </p:nvSpPr>
-        <p:spPr>
-          <a:xfrm>
-            <a:off x="7013448" y="2871216"/>
-            <a:ext cx="1298448" cy="310896"/>
-          </a:xfrm>
-          <a:prstGeom prst="roundRect">
-            <a:avLst>
-              <a:gd name="adj" fmla="val 50000"/>
-            </a:avLst>
-          </a:prstGeom>
-          <a:solidFill>
-            <a:srgbClr val="FCECEC"/>
-          </a:solidFill>
-          <a:ln>
-            <a:noFill/>
-          </a:ln>
-          <a:effectLst/>
-        </p:spPr>
-        <p:style>
-          <a:lnRef idx="1">
-            <a:schemeClr val="accent1"/>
-          </a:lnRef>
-          <a:fillRef idx="3">
-            <a:schemeClr val="accent1"/>
-          </a:fillRef>
-          <a:effectRef idx="2">
-            <a:schemeClr val="accent1"/>
-          </a:effectRef>
-          <a:fontRef idx="minor">
-            <a:schemeClr val="lt1"/>
-          </a:fontRef>
-        </p:style>
-        <p:txBody>
-          <a:bodyPr rtlCol="0" anchor="ctr"/>
-          <a:lstStyle/>
-          <a:p>
-            <a:pPr algn="ctr"/>
-          </a:p>
-        </p:txBody>
-      </p:sp>
-      <p:sp>
-        <p:nvSpPr>
-          <p:cNvPr id="24" name="TextBox 23"/>
-          <p:cNvSpPr txBox="1"/>
-          <p:nvPr/>
-        </p:nvSpPr>
-        <p:spPr>
-          <a:xfrm>
-            <a:off x="7013448" y="2871216"/>
-            <a:ext cx="1298448" cy="310896"/>
-          </a:xfrm>
-          <a:prstGeom prst="rect">
-            <a:avLst/>
-          </a:prstGeom>
-          <a:noFill/>
-        </p:spPr>
-        <p:txBody>
-          <a:bodyPr wrap="none" anchor="ctr" lIns="0" rIns="0" tIns="0" bIns="0">
-            <a:spAutoFit/>
-          </a:bodyPr>
-          <a:lstStyle/>
-          <a:p>
-            <a:pPr algn="ctr">
-              <a:lnSpc>
-                <a:spcPct val="106000"/>
-              </a:lnSpc>
-              <a:spcBef>
-                <a:spcPts val="0"/>
-              </a:spcBef>
-              <a:spcAft>
-                <a:spcPts val="0"/>
-              </a:spcAft>
-            </a:pPr>
-            <a:r>
-              <a:rPr sz="850" b="1">
-                <a:solidFill>
-                  <a:srgbClr val="B80000"/>
-                </a:solidFill>
-                <a:latin typeface="Red Hat Display"/>
-              </a:rPr>
-              <a:t>MEDIA PASS</a:t>
-            </a:r>
-          </a:p>
-        </p:txBody>
-      </p:sp>
-      <p:pic>
-        <p:nvPicPr>
-          <p:cNvPr id="25" name="Picture 24" descr="eye_slate.png"/>
-          <p:cNvPicPr>
-            <a:picLocks noChangeAspect="1"/>
-          </p:cNvPicPr>
-          <p:nvPr/>
-        </p:nvPicPr>
-        <p:blipFill>
-          <a:blip r:embed="rId4"/>
-          <a:stretch>
-            <a:fillRect/>
-          </a:stretch>
-        </p:blipFill>
-        <p:spPr>
-          <a:xfrm>
-            <a:off x="8843619" y="3383280"/>
-            <a:ext cx="475488" cy="475488"/>
-          </a:xfrm>
-          <a:prstGeom prst="rect">
-            <a:avLst/>
-          </a:prstGeom>
-        </p:spPr>
-      </p:pic>
-      <p:sp>
-        <p:nvSpPr>
-          <p:cNvPr id="26" name="TextBox 25"/>
-          <p:cNvSpPr txBox="1"/>
-          <p:nvPr/>
-        </p:nvSpPr>
-        <p:spPr>
-          <a:xfrm>
-            <a:off x="7050024" y="3995928"/>
-            <a:ext cx="4062679" cy="1481328"/>
-          </a:xfrm>
-          <a:prstGeom prst="rect">
-            <a:avLst/>
-          </a:prstGeom>
-          <a:noFill/>
-        </p:spPr>
-        <p:txBody>
-          <a:bodyPr wrap="square" anchor="t" lIns="0" rIns="0" tIns="0" bIns="0">
-            <a:spAutoFit/>
-          </a:bodyPr>
-          <a:lstStyle/>
-          <a:p>
-            <a:pPr algn="l">
-              <a:lnSpc>
-                <a:spcPct val="120000"/>
-              </a:lnSpc>
-              <a:spcBef>
-                <a:spcPts val="0"/>
-              </a:spcBef>
-              <a:spcAft>
-                <a:spcPts val="0"/>
-              </a:spcAft>
-            </a:pPr>
-            <a:r>
-              <a:rPr sz="950" b="0">
-                <a:solidFill>
-                  <a:srgbClr val="8A9099"/>
-                </a:solidFill>
-                <a:latin typeface="Red Hat Text"/>
-              </a:rPr>
-              <a:t>A 24-hour load curve (spiky daytime, flat-zero overnight) with two overlays: a flat "Deployment: reserved capacity" band across the whole day, vs a "Serverless: pods track the curve, zero at night" shaded region — the gap between them labelled "what you stop paying for."</a:t>
             </a:r>
           </a:p>
         </p:txBody>
@@ -5439,11 +5532,11 @@
         <p:spPr>
           <a:xfrm>
             <a:off x="841248" y="2395728"/>
-            <a:ext cx="5715000" cy="530352"/>
+            <a:ext cx="5138928" cy="786384"/>
           </a:xfrm>
           <a:prstGeom prst="roundRect">
             <a:avLst>
-              <a:gd name="adj" fmla="val 6000"/>
+              <a:gd name="adj" fmla="val 7000"/>
             </a:avLst>
           </a:prstGeom>
           <a:solidFill>
@@ -5478,9 +5571,55 @@
           </a:p>
         </p:txBody>
       </p:sp>
+      <p:sp>
+        <p:nvSpPr>
+          <p:cNvPr id="7" name="Rounded Rectangle 6"/>
+          <p:cNvSpPr/>
+          <p:nvPr/>
+        </p:nvSpPr>
+        <p:spPr>
+          <a:xfrm>
+            <a:off x="987552" y="2532888"/>
+            <a:ext cx="512064" cy="512064"/>
+          </a:xfrm>
+          <a:prstGeom prst="roundRect">
+            <a:avLst>
+              <a:gd name="adj" fmla="val 26000"/>
+            </a:avLst>
+          </a:prstGeom>
+          <a:solidFill>
+            <a:srgbClr val="EE0000"/>
+          </a:solidFill>
+          <a:ln>
+            <a:noFill/>
+          </a:ln>
+          <a:effectLst/>
+        </p:spPr>
+        <p:style>
+          <a:lnRef idx="1">
+            <a:schemeClr val="accent1"/>
+          </a:lnRef>
+          <a:fillRef idx="3">
+            <a:schemeClr val="accent1"/>
+          </a:fillRef>
+          <a:effectRef idx="2">
+            <a:schemeClr val="accent1"/>
+          </a:effectRef>
+          <a:fontRef idx="minor">
+            <a:schemeClr val="lt1"/>
+          </a:fontRef>
+        </p:style>
+        <p:txBody>
+          <a:bodyPr rtlCol="0" anchor="ctr"/>
+          <a:lstStyle/>
+          <a:p>
+            <a:pPr algn="ctr"/>
+          </a:p>
+        </p:txBody>
+      </p:sp>
       <p:pic>
         <p:nvPicPr>
-          <p:cNvPr id="7" name="Picture 6" descr="check_steel.png"/>
+          <p:cNvPr id="8" name="Picture 7" descr="check_white.png"/>
           <p:cNvPicPr>
             <a:picLocks noChangeAspect="1"/>
           </p:cNvPicPr>
@@ -5494,8 +5633,8 @@
         </p:blipFill>
         <p:spPr>
           <a:xfrm>
-            <a:off x="987552" y="2542032"/>
-            <a:ext cx="237744" cy="237744"/>
+            <a:off x="1110447" y="2655783"/>
+            <a:ext cx="266273" cy="266273"/>
           </a:xfrm>
           <a:prstGeom prst="rect">
             <a:avLst/>
@@ -5504,14 +5643,14 @@
       </p:pic>
       <p:sp>
         <p:nvSpPr>
-          <p:cNvPr id="8" name="TextBox 7"/>
+          <p:cNvPr id="9" name="TextBox 8"/>
           <p:cNvSpPr txBox="1"/>
           <p:nvPr/>
         </p:nvSpPr>
         <p:spPr>
           <a:xfrm>
-            <a:off x="1353312" y="2395728"/>
-            <a:ext cx="5029200" cy="530352"/>
+            <a:off x="1627632" y="2395728"/>
+            <a:ext cx="4206240" cy="786384"/>
           </a:xfrm>
           <a:prstGeom prst="rect">
             <a:avLst/>
@@ -5536,7 +5675,7 @@
               </a:spcAft>
             </a:pPr>
             <a:r>
-              <a:rPr sz="1200" b="0">
+              <a:rPr sz="1150" b="0">
                 <a:solidFill>
                   <a:srgbClr val="1A1A1A"/>
                 </a:solidFill>
@@ -5549,18 +5688,18 @@
       </p:sp>
       <p:sp>
         <p:nvSpPr>
-          <p:cNvPr id="9" name="Rounded Rectangle 8"/>
+          <p:cNvPr id="10" name="Rounded Rectangle 9"/>
           <p:cNvSpPr/>
           <p:nvPr/>
         </p:nvSpPr>
         <p:spPr>
           <a:xfrm>
-            <a:off x="841248" y="2999232"/>
-            <a:ext cx="5715000" cy="530352"/>
+            <a:off x="6254496" y="2395728"/>
+            <a:ext cx="5138928" cy="786384"/>
           </a:xfrm>
           <a:prstGeom prst="roundRect">
             <a:avLst>
-              <a:gd name="adj" fmla="val 6000"/>
+              <a:gd name="adj" fmla="val 7000"/>
             </a:avLst>
           </a:prstGeom>
           <a:solidFill>
@@ -5595,9 +5734,55 @@
           </a:p>
         </p:txBody>
       </p:sp>
+      <p:sp>
+        <p:nvSpPr>
+          <p:cNvPr id="11" name="Rounded Rectangle 10"/>
+          <p:cNvSpPr/>
+          <p:nvPr/>
+        </p:nvSpPr>
+        <p:spPr>
+          <a:xfrm>
+            <a:off x="6400800" y="2532888"/>
+            <a:ext cx="512064" cy="512064"/>
+          </a:xfrm>
+          <a:prstGeom prst="roundRect">
+            <a:avLst>
+              <a:gd name="adj" fmla="val 26000"/>
+            </a:avLst>
+          </a:prstGeom>
+          <a:solidFill>
+            <a:srgbClr val="EE0000"/>
+          </a:solidFill>
+          <a:ln>
+            <a:noFill/>
+          </a:ln>
+          <a:effectLst/>
+        </p:spPr>
+        <p:style>
+          <a:lnRef idx="1">
+            <a:schemeClr val="accent1"/>
+          </a:lnRef>
+          <a:fillRef idx="3">
+            <a:schemeClr val="accent1"/>
+          </a:fillRef>
+          <a:effectRef idx="2">
+            <a:schemeClr val="accent1"/>
+          </a:effectRef>
+          <a:fontRef idx="minor">
+            <a:schemeClr val="lt1"/>
+          </a:fontRef>
+        </p:style>
+        <p:txBody>
+          <a:bodyPr rtlCol="0" anchor="ctr"/>
+          <a:lstStyle/>
+          <a:p>
+            <a:pPr algn="ctr"/>
+          </a:p>
+        </p:txBody>
+      </p:sp>
       <p:pic>
         <p:nvPicPr>
-          <p:cNvPr id="10" name="Picture 9" descr="check_steel.png"/>
+          <p:cNvPr id="12" name="Picture 11" descr="check_white.png"/>
           <p:cNvPicPr>
             <a:picLocks noChangeAspect="1"/>
           </p:cNvPicPr>
@@ -5611,8 +5796,8 @@
         </p:blipFill>
         <p:spPr>
           <a:xfrm>
-            <a:off x="987552" y="3145536"/>
-            <a:ext cx="237744" cy="237744"/>
+            <a:off x="6523695" y="2655783"/>
+            <a:ext cx="266273" cy="266273"/>
           </a:xfrm>
           <a:prstGeom prst="rect">
             <a:avLst/>
@@ -5621,14 +5806,14 @@
       </p:pic>
       <p:sp>
         <p:nvSpPr>
-          <p:cNvPr id="11" name="TextBox 10"/>
+          <p:cNvPr id="13" name="TextBox 12"/>
           <p:cNvSpPr txBox="1"/>
           <p:nvPr/>
         </p:nvSpPr>
         <p:spPr>
           <a:xfrm>
-            <a:off x="1353312" y="2999232"/>
-            <a:ext cx="5029200" cy="530352"/>
+            <a:off x="7040880" y="2395728"/>
+            <a:ext cx="4206240" cy="786384"/>
           </a:xfrm>
           <a:prstGeom prst="rect">
             <a:avLst/>
@@ -5653,7 +5838,7 @@
               </a:spcAft>
             </a:pPr>
             <a:r>
-              <a:rPr sz="1200" b="0">
+              <a:rPr sz="1150" b="0">
                 <a:solidFill>
                   <a:srgbClr val="1A1A1A"/>
                 </a:solidFill>
@@ -5666,18 +5851,18 @@
       </p:sp>
       <p:sp>
         <p:nvSpPr>
-          <p:cNvPr id="12" name="Rounded Rectangle 11"/>
+          <p:cNvPr id="14" name="Rounded Rectangle 13"/>
           <p:cNvSpPr/>
           <p:nvPr/>
         </p:nvSpPr>
         <p:spPr>
           <a:xfrm>
-            <a:off x="841248" y="3602736"/>
-            <a:ext cx="5715000" cy="530352"/>
+            <a:off x="841248" y="3328416"/>
+            <a:ext cx="5138928" cy="786384"/>
           </a:xfrm>
           <a:prstGeom prst="roundRect">
             <a:avLst>
-              <a:gd name="adj" fmla="val 6000"/>
+              <a:gd name="adj" fmla="val 7000"/>
             </a:avLst>
           </a:prstGeom>
           <a:solidFill>
@@ -5712,9 +5897,55 @@
           </a:p>
         </p:txBody>
       </p:sp>
+      <p:sp>
+        <p:nvSpPr>
+          <p:cNvPr id="15" name="Rounded Rectangle 14"/>
+          <p:cNvSpPr/>
+          <p:nvPr/>
+        </p:nvSpPr>
+        <p:spPr>
+          <a:xfrm>
+            <a:off x="987552" y="3465576"/>
+            <a:ext cx="512064" cy="512064"/>
+          </a:xfrm>
+          <a:prstGeom prst="roundRect">
+            <a:avLst>
+              <a:gd name="adj" fmla="val 26000"/>
+            </a:avLst>
+          </a:prstGeom>
+          <a:solidFill>
+            <a:srgbClr val="EE0000"/>
+          </a:solidFill>
+          <a:ln>
+            <a:noFill/>
+          </a:ln>
+          <a:effectLst/>
+        </p:spPr>
+        <p:style>
+          <a:lnRef idx="1">
+            <a:schemeClr val="accent1"/>
+          </a:lnRef>
+          <a:fillRef idx="3">
+            <a:schemeClr val="accent1"/>
+          </a:fillRef>
+          <a:effectRef idx="2">
+            <a:schemeClr val="accent1"/>
+          </a:effectRef>
+          <a:fontRef idx="minor">
+            <a:schemeClr val="lt1"/>
+          </a:fontRef>
+        </p:style>
+        <p:txBody>
+          <a:bodyPr rtlCol="0" anchor="ctr"/>
+          <a:lstStyle/>
+          <a:p>
+            <a:pPr algn="ctr"/>
+          </a:p>
+        </p:txBody>
+      </p:sp>
       <p:pic>
         <p:nvPicPr>
-          <p:cNvPr id="13" name="Picture 12" descr="check_steel.png"/>
+          <p:cNvPr id="16" name="Picture 15" descr="check_white.png"/>
           <p:cNvPicPr>
             <a:picLocks noChangeAspect="1"/>
           </p:cNvPicPr>
@@ -5728,8 +5959,8 @@
         </p:blipFill>
         <p:spPr>
           <a:xfrm>
-            <a:off x="987552" y="3749040"/>
-            <a:ext cx="237744" cy="237744"/>
+            <a:off x="1110447" y="3588471"/>
+            <a:ext cx="266273" cy="266273"/>
           </a:xfrm>
           <a:prstGeom prst="rect">
             <a:avLst/>
@@ -5738,14 +5969,14 @@
       </p:pic>
       <p:sp>
         <p:nvSpPr>
-          <p:cNvPr id="14" name="TextBox 13"/>
+          <p:cNvPr id="17" name="TextBox 16"/>
           <p:cNvSpPr txBox="1"/>
           <p:nvPr/>
         </p:nvSpPr>
         <p:spPr>
           <a:xfrm>
-            <a:off x="1353312" y="3602736"/>
-            <a:ext cx="5029200" cy="530352"/>
+            <a:off x="1627632" y="3328416"/>
+            <a:ext cx="4206240" cy="786384"/>
           </a:xfrm>
           <a:prstGeom prst="rect">
             <a:avLst/>
@@ -5770,7 +6001,7 @@
               </a:spcAft>
             </a:pPr>
             <a:r>
-              <a:rPr sz="1200" b="0">
+              <a:rPr sz="1150" b="0">
                 <a:solidFill>
                   <a:srgbClr val="1A1A1A"/>
                 </a:solidFill>
@@ -5783,18 +6014,18 @@
       </p:sp>
       <p:sp>
         <p:nvSpPr>
-          <p:cNvPr id="15" name="Rounded Rectangle 14"/>
+          <p:cNvPr id="18" name="Rounded Rectangle 17"/>
           <p:cNvSpPr/>
           <p:nvPr/>
         </p:nvSpPr>
         <p:spPr>
           <a:xfrm>
-            <a:off x="841248" y="4206240"/>
-            <a:ext cx="5715000" cy="530352"/>
+            <a:off x="6254496" y="3328416"/>
+            <a:ext cx="5138928" cy="786384"/>
           </a:xfrm>
           <a:prstGeom prst="roundRect">
             <a:avLst>
-              <a:gd name="adj" fmla="val 6000"/>
+              <a:gd name="adj" fmla="val 7000"/>
             </a:avLst>
           </a:prstGeom>
           <a:solidFill>
@@ -5829,9 +6060,55 @@
           </a:p>
         </p:txBody>
       </p:sp>
+      <p:sp>
+        <p:nvSpPr>
+          <p:cNvPr id="19" name="Rounded Rectangle 18"/>
+          <p:cNvSpPr/>
+          <p:nvPr/>
+        </p:nvSpPr>
+        <p:spPr>
+          <a:xfrm>
+            <a:off x="6400800" y="3465576"/>
+            <a:ext cx="512064" cy="512064"/>
+          </a:xfrm>
+          <a:prstGeom prst="roundRect">
+            <a:avLst>
+              <a:gd name="adj" fmla="val 26000"/>
+            </a:avLst>
+          </a:prstGeom>
+          <a:solidFill>
+            <a:srgbClr val="EE0000"/>
+          </a:solidFill>
+          <a:ln>
+            <a:noFill/>
+          </a:ln>
+          <a:effectLst/>
+        </p:spPr>
+        <p:style>
+          <a:lnRef idx="1">
+            <a:schemeClr val="accent1"/>
+          </a:lnRef>
+          <a:fillRef idx="3">
+            <a:schemeClr val="accent1"/>
+          </a:fillRef>
+          <a:effectRef idx="2">
+            <a:schemeClr val="accent1"/>
+          </a:effectRef>
+          <a:fontRef idx="minor">
+            <a:schemeClr val="lt1"/>
+          </a:fontRef>
+        </p:style>
+        <p:txBody>
+          <a:bodyPr rtlCol="0" anchor="ctr"/>
+          <a:lstStyle/>
+          <a:p>
+            <a:pPr algn="ctr"/>
+          </a:p>
+        </p:txBody>
+      </p:sp>
       <p:pic>
         <p:nvPicPr>
-          <p:cNvPr id="16" name="Picture 15" descr="check_steel.png"/>
+          <p:cNvPr id="20" name="Picture 19" descr="check_white.png"/>
           <p:cNvPicPr>
             <a:picLocks noChangeAspect="1"/>
           </p:cNvPicPr>
@@ -5845,8 +6122,8 @@
         </p:blipFill>
         <p:spPr>
           <a:xfrm>
-            <a:off x="987552" y="4352544"/>
-            <a:ext cx="237744" cy="237744"/>
+            <a:off x="6523695" y="3588471"/>
+            <a:ext cx="266273" cy="266273"/>
           </a:xfrm>
           <a:prstGeom prst="rect">
             <a:avLst/>
@@ -5855,14 +6132,14 @@
       </p:pic>
       <p:sp>
         <p:nvSpPr>
-          <p:cNvPr id="17" name="TextBox 16"/>
+          <p:cNvPr id="21" name="TextBox 20"/>
           <p:cNvSpPr txBox="1"/>
           <p:nvPr/>
         </p:nvSpPr>
         <p:spPr>
           <a:xfrm>
-            <a:off x="1353312" y="4206240"/>
-            <a:ext cx="5029200" cy="530352"/>
+            <a:off x="7040880" y="3328416"/>
+            <a:ext cx="4206240" cy="786384"/>
           </a:xfrm>
           <a:prstGeom prst="rect">
             <a:avLst/>
@@ -5887,7 +6164,7 @@
               </a:spcAft>
             </a:pPr>
             <a:r>
-              <a:rPr sz="1200" b="0">
+              <a:rPr sz="1150" b="0">
                 <a:solidFill>
                   <a:srgbClr val="1A1A1A"/>
                 </a:solidFill>
@@ -5900,18 +6177,18 @@
       </p:sp>
       <p:sp>
         <p:nvSpPr>
-          <p:cNvPr id="18" name="Rounded Rectangle 17"/>
+          <p:cNvPr id="22" name="Rounded Rectangle 21"/>
           <p:cNvSpPr/>
           <p:nvPr/>
         </p:nvSpPr>
         <p:spPr>
           <a:xfrm>
-            <a:off x="841248" y="4809744"/>
-            <a:ext cx="5715000" cy="530352"/>
+            <a:off x="841248" y="4261104"/>
+            <a:ext cx="5138928" cy="786384"/>
           </a:xfrm>
           <a:prstGeom prst="roundRect">
             <a:avLst>
-              <a:gd name="adj" fmla="val 6000"/>
+              <a:gd name="adj" fmla="val 7000"/>
             </a:avLst>
           </a:prstGeom>
           <a:solidFill>
@@ -5946,9 +6223,55 @@
           </a:p>
         </p:txBody>
       </p:sp>
+      <p:sp>
+        <p:nvSpPr>
+          <p:cNvPr id="23" name="Rounded Rectangle 22"/>
+          <p:cNvSpPr/>
+          <p:nvPr/>
+        </p:nvSpPr>
+        <p:spPr>
+          <a:xfrm>
+            <a:off x="987552" y="4398264"/>
+            <a:ext cx="512064" cy="512064"/>
+          </a:xfrm>
+          <a:prstGeom prst="roundRect">
+            <a:avLst>
+              <a:gd name="adj" fmla="val 26000"/>
+            </a:avLst>
+          </a:prstGeom>
+          <a:solidFill>
+            <a:srgbClr val="EE0000"/>
+          </a:solidFill>
+          <a:ln>
+            <a:noFill/>
+          </a:ln>
+          <a:effectLst/>
+        </p:spPr>
+        <p:style>
+          <a:lnRef idx="1">
+            <a:schemeClr val="accent1"/>
+          </a:lnRef>
+          <a:fillRef idx="3">
+            <a:schemeClr val="accent1"/>
+          </a:fillRef>
+          <a:effectRef idx="2">
+            <a:schemeClr val="accent1"/>
+          </a:effectRef>
+          <a:fontRef idx="minor">
+            <a:schemeClr val="lt1"/>
+          </a:fontRef>
+        </p:style>
+        <p:txBody>
+          <a:bodyPr rtlCol="0" anchor="ctr"/>
+          <a:lstStyle/>
+          <a:p>
+            <a:pPr algn="ctr"/>
+          </a:p>
+        </p:txBody>
+      </p:sp>
       <p:pic>
         <p:nvPicPr>
-          <p:cNvPr id="19" name="Picture 18" descr="check_steel.png"/>
+          <p:cNvPr id="24" name="Picture 23" descr="check_white.png"/>
           <p:cNvPicPr>
             <a:picLocks noChangeAspect="1"/>
           </p:cNvPicPr>
@@ -5962,8 +6285,8 @@
         </p:blipFill>
         <p:spPr>
           <a:xfrm>
-            <a:off x="987552" y="4956048"/>
-            <a:ext cx="237744" cy="237744"/>
+            <a:off x="1110447" y="4521159"/>
+            <a:ext cx="266273" cy="266273"/>
           </a:xfrm>
           <a:prstGeom prst="rect">
             <a:avLst/>
@@ -5972,14 +6295,14 @@
       </p:pic>
       <p:sp>
         <p:nvSpPr>
-          <p:cNvPr id="20" name="TextBox 19"/>
+          <p:cNvPr id="25" name="TextBox 24"/>
           <p:cNvSpPr txBox="1"/>
           <p:nvPr/>
         </p:nvSpPr>
         <p:spPr>
           <a:xfrm>
-            <a:off x="1353312" y="4809744"/>
-            <a:ext cx="5029200" cy="530352"/>
+            <a:off x="1627632" y="4261104"/>
+            <a:ext cx="4206240" cy="786384"/>
           </a:xfrm>
           <a:prstGeom prst="rect">
             <a:avLst/>
@@ -6004,221 +6327,13 @@
               </a:spcAft>
             </a:pPr>
             <a:r>
-              <a:rPr sz="1200" b="0">
+              <a:rPr sz="1150" b="0">
                 <a:solidFill>
                   <a:srgbClr val="1A1A1A"/>
                 </a:solidFill>
                 <a:latin typeface="Red Hat Text"/>
               </a:rPr>
               <a:t>A running pod carries your app + a queue-proxy sidecar</a:t>
-            </a:r>
-          </a:p>
-        </p:txBody>
-      </p:sp>
-      <p:sp>
-        <p:nvSpPr>
-          <p:cNvPr id="21" name="Rounded Rectangle 20"/>
-          <p:cNvSpPr/>
-          <p:nvPr/>
-        </p:nvSpPr>
-        <p:spPr>
-          <a:xfrm>
-            <a:off x="6812280" y="2395728"/>
-            <a:ext cx="4538167" cy="2944368"/>
-          </a:xfrm>
-          <a:prstGeom prst="roundRect">
-            <a:avLst>
-              <a:gd name="adj" fmla="val 4000"/>
-            </a:avLst>
-          </a:prstGeom>
-          <a:solidFill>
-            <a:srgbClr val="FFFFFF"/>
-          </a:solidFill>
-          <a:ln w="15240">
-            <a:solidFill>
-              <a:srgbClr val="DDE1E6"/>
-            </a:solidFill>
-          </a:ln>
-          <a:effectLst/>
-        </p:spPr>
-        <p:style>
-          <a:lnRef idx="1">
-            <a:schemeClr val="accent1"/>
-          </a:lnRef>
-          <a:fillRef idx="3">
-            <a:schemeClr val="accent1"/>
-          </a:fillRef>
-          <a:effectRef idx="2">
-            <a:schemeClr val="accent1"/>
-          </a:effectRef>
-          <a:fontRef idx="minor">
-            <a:schemeClr val="lt1"/>
-          </a:fontRef>
-        </p:style>
-        <p:txBody>
-          <a:bodyPr rtlCol="0" anchor="ctr"/>
-          <a:lstStyle/>
-          <a:p>
-            <a:pPr algn="ctr"/>
-          </a:p>
-        </p:txBody>
-      </p:sp>
-      <p:sp>
-        <p:nvSpPr>
-          <p:cNvPr id="22" name="Rounded Rectangle 21"/>
-          <p:cNvSpPr/>
-          <p:nvPr/>
-        </p:nvSpPr>
-        <p:spPr>
-          <a:xfrm>
-            <a:off x="7013448" y="2596896"/>
-            <a:ext cx="1298448" cy="310896"/>
-          </a:xfrm>
-          <a:prstGeom prst="roundRect">
-            <a:avLst>
-              <a:gd name="adj" fmla="val 50000"/>
-            </a:avLst>
-          </a:prstGeom>
-          <a:solidFill>
-            <a:srgbClr val="FCECEC"/>
-          </a:solidFill>
-          <a:ln>
-            <a:noFill/>
-          </a:ln>
-          <a:effectLst/>
-        </p:spPr>
-        <p:style>
-          <a:lnRef idx="1">
-            <a:schemeClr val="accent1"/>
-          </a:lnRef>
-          <a:fillRef idx="3">
-            <a:schemeClr val="accent1"/>
-          </a:fillRef>
-          <a:effectRef idx="2">
-            <a:schemeClr val="accent1"/>
-          </a:effectRef>
-          <a:fontRef idx="minor">
-            <a:schemeClr val="lt1"/>
-          </a:fontRef>
-        </p:style>
-        <p:txBody>
-          <a:bodyPr rtlCol="0" anchor="ctr"/>
-          <a:lstStyle/>
-          <a:p>
-            <a:pPr algn="ctr"/>
-          </a:p>
-        </p:txBody>
-      </p:sp>
-      <p:sp>
-        <p:nvSpPr>
-          <p:cNvPr id="23" name="TextBox 22"/>
-          <p:cNvSpPr txBox="1"/>
-          <p:nvPr/>
-        </p:nvSpPr>
-        <p:spPr>
-          <a:xfrm>
-            <a:off x="7013448" y="2596896"/>
-            <a:ext cx="1298448" cy="310896"/>
-          </a:xfrm>
-          <a:prstGeom prst="rect">
-            <a:avLst/>
-          </a:prstGeom>
-          <a:noFill/>
-        </p:spPr>
-        <p:txBody>
-          <a:bodyPr wrap="none" anchor="ctr" lIns="0" rIns="0" tIns="0" bIns="0">
-            <a:spAutoFit/>
-          </a:bodyPr>
-          <a:lstStyle/>
-          <a:p>
-            <a:pPr algn="ctr">
-              <a:lnSpc>
-                <a:spcPct val="106000"/>
-              </a:lnSpc>
-              <a:spcBef>
-                <a:spcPts val="0"/>
-              </a:spcBef>
-              <a:spcAft>
-                <a:spcPts val="0"/>
-              </a:spcAft>
-            </a:pPr>
-            <a:r>
-              <a:rPr sz="850" b="1">
-                <a:solidFill>
-                  <a:srgbClr val="B80000"/>
-                </a:solidFill>
-                <a:latin typeface="Red Hat Display"/>
-              </a:rPr>
-              <a:t>MEDIA PASS</a:t>
-            </a:r>
-          </a:p>
-        </p:txBody>
-      </p:sp>
-      <p:pic>
-        <p:nvPicPr>
-          <p:cNvPr id="24" name="Picture 23" descr="eye_slate.png"/>
-          <p:cNvPicPr>
-            <a:picLocks noChangeAspect="1"/>
-          </p:cNvPicPr>
-          <p:nvPr/>
-        </p:nvPicPr>
-        <p:blipFill>
-          <a:blip r:embed="rId4"/>
-          <a:stretch>
-            <a:fillRect/>
-          </a:stretch>
-        </p:blipFill>
-        <p:spPr>
-          <a:xfrm>
-            <a:off x="8843619" y="3108960"/>
-            <a:ext cx="475488" cy="475488"/>
-          </a:xfrm>
-          <a:prstGeom prst="rect">
-            <a:avLst/>
-          </a:prstGeom>
-        </p:spPr>
-      </p:pic>
-      <p:sp>
-        <p:nvSpPr>
-          <p:cNvPr id="25" name="TextBox 24"/>
-          <p:cNvSpPr txBox="1"/>
-          <p:nvPr/>
-        </p:nvSpPr>
-        <p:spPr>
-          <a:xfrm>
-            <a:off x="7050024" y="3721608"/>
-            <a:ext cx="4062679" cy="1481328"/>
-          </a:xfrm>
-          <a:prstGeom prst="rect">
-            <a:avLst/>
-          </a:prstGeom>
-          <a:noFill/>
-        </p:spPr>
-        <p:txBody>
-          <a:bodyPr wrap="square" anchor="t" lIns="0" rIns="0" tIns="0" bIns="0">
-            <a:spAutoFit/>
-          </a:bodyPr>
-          <a:lstStyle/>
-          <a:p>
-            <a:pPr algn="l">
-              <a:lnSpc>
-                <a:spcPct val="120000"/>
-              </a:lnSpc>
-              <a:spcBef>
-                <a:spcPts val="0"/>
-              </a:spcBef>
-              <a:spcAft>
-                <a:spcPts val="0"/>
-              </a:spcAft>
-            </a:pPr>
-            <a:r>
-              <a:rPr sz="950" b="0">
-                <a:solidFill>
-                  <a:srgbClr val="8A9099"/>
-                </a:solidFill>
-                <a:latin typeface="Red Hat Text"/>
-              </a:rPr>
-              <a:t>One "ksvc" card at the top fanning out to five boxes Knative creates (Deployment+KPA, Service, Route, Configuration, Revision), with the Route box flagged "auto-created (edge/Kourier) → status.url" and a red strike-through on a "oc create route edge" attempt.</a:t>
             </a:r>
           </a:p>
         </p:txBody>
@@ -6571,7 +6686,7 @@
         <p:spPr>
           <a:xfrm>
             <a:off x="841248" y="2670048"/>
-            <a:ext cx="5715000" cy="530352"/>
+            <a:ext cx="4160520" cy="475488"/>
           </a:xfrm>
           <a:prstGeom prst="roundRect">
             <a:avLst>
@@ -6626,8 +6741,8 @@
         </p:blipFill>
         <p:spPr>
           <a:xfrm>
-            <a:off x="987552" y="2816352"/>
-            <a:ext cx="237744" cy="237744"/>
+            <a:off x="969264" y="2807208"/>
+            <a:ext cx="201168" cy="201168"/>
           </a:xfrm>
           <a:prstGeom prst="rect">
             <a:avLst/>
@@ -6642,8 +6757,8 @@
         </p:nvSpPr>
         <p:spPr>
           <a:xfrm>
-            <a:off x="1353312" y="2670048"/>
-            <a:ext cx="5029200" cy="530352"/>
+            <a:off x="1280160" y="2670048"/>
+            <a:ext cx="3593591" cy="475488"/>
           </a:xfrm>
           <a:prstGeom prst="rect">
             <a:avLst/>
@@ -6668,7 +6783,7 @@
               </a:spcAft>
             </a:pPr>
             <a:r>
-              <a:rPr sz="1200" b="0">
+              <a:rPr sz="1050" b="0">
                 <a:solidFill>
                   <a:srgbClr val="1A1A1A"/>
                 </a:solidFill>
@@ -6687,8 +6802,8 @@
         </p:nvSpPr>
         <p:spPr>
           <a:xfrm>
-            <a:off x="841248" y="3273552"/>
-            <a:ext cx="5715000" cy="530352"/>
+            <a:off x="841248" y="3218688"/>
+            <a:ext cx="4160520" cy="475488"/>
           </a:xfrm>
           <a:prstGeom prst="roundRect">
             <a:avLst>
@@ -6743,8 +6858,8 @@
         </p:blipFill>
         <p:spPr>
           <a:xfrm>
-            <a:off x="987552" y="3419856"/>
-            <a:ext cx="237744" cy="237744"/>
+            <a:off x="969264" y="3355848"/>
+            <a:ext cx="201168" cy="201168"/>
           </a:xfrm>
           <a:prstGeom prst="rect">
             <a:avLst/>
@@ -6759,8 +6874,8 @@
         </p:nvSpPr>
         <p:spPr>
           <a:xfrm>
-            <a:off x="1353312" y="3273552"/>
-            <a:ext cx="5029200" cy="530352"/>
+            <a:off x="1280160" y="3218688"/>
+            <a:ext cx="3593591" cy="475488"/>
           </a:xfrm>
           <a:prstGeom prst="rect">
             <a:avLst/>
@@ -6785,7 +6900,7 @@
               </a:spcAft>
             </a:pPr>
             <a:r>
-              <a:rPr sz="1200" b="0">
+              <a:rPr sz="1050" b="0">
                 <a:solidFill>
                   <a:srgbClr val="1A1A1A"/>
                 </a:solidFill>
@@ -6804,8 +6919,8 @@
         </p:nvSpPr>
         <p:spPr>
           <a:xfrm>
-            <a:off x="841248" y="3877056"/>
-            <a:ext cx="5715000" cy="530352"/>
+            <a:off x="841248" y="3767328"/>
+            <a:ext cx="4160520" cy="475488"/>
           </a:xfrm>
           <a:prstGeom prst="roundRect">
             <a:avLst>
@@ -6860,8 +6975,8 @@
         </p:blipFill>
         <p:spPr>
           <a:xfrm>
-            <a:off x="987552" y="4023360"/>
-            <a:ext cx="237744" cy="237744"/>
+            <a:off x="969264" y="3904487"/>
+            <a:ext cx="201168" cy="201168"/>
           </a:xfrm>
           <a:prstGeom prst="rect">
             <a:avLst/>
@@ -6876,8 +6991,8 @@
         </p:nvSpPr>
         <p:spPr>
           <a:xfrm>
-            <a:off x="1353312" y="3877056"/>
-            <a:ext cx="5029200" cy="530352"/>
+            <a:off x="1280160" y="3767328"/>
+            <a:ext cx="3593591" cy="475488"/>
           </a:xfrm>
           <a:prstGeom prst="rect">
             <a:avLst/>
@@ -6902,7 +7017,7 @@
               </a:spcAft>
             </a:pPr>
             <a:r>
-              <a:rPr sz="1200" b="0">
+              <a:rPr sz="1050" b="0">
                 <a:solidFill>
                   <a:srgbClr val="1A1A1A"/>
                 </a:solidFill>
@@ -6921,8 +7036,8 @@
         </p:nvSpPr>
         <p:spPr>
           <a:xfrm>
-            <a:off x="841248" y="4480560"/>
-            <a:ext cx="5715000" cy="530352"/>
+            <a:off x="841248" y="4315968"/>
+            <a:ext cx="4160520" cy="475488"/>
           </a:xfrm>
           <a:prstGeom prst="roundRect">
             <a:avLst>
@@ -6977,8 +7092,8 @@
         </p:blipFill>
         <p:spPr>
           <a:xfrm>
-            <a:off x="987552" y="4626864"/>
-            <a:ext cx="237744" cy="237744"/>
+            <a:off x="969264" y="4453127"/>
+            <a:ext cx="201168" cy="201168"/>
           </a:xfrm>
           <a:prstGeom prst="rect">
             <a:avLst/>
@@ -6993,8 +7108,8 @@
         </p:nvSpPr>
         <p:spPr>
           <a:xfrm>
-            <a:off x="1353312" y="4480560"/>
-            <a:ext cx="5029200" cy="530352"/>
+            <a:off x="1280160" y="4315968"/>
+            <a:ext cx="3593591" cy="475488"/>
           </a:xfrm>
           <a:prstGeom prst="rect">
             <a:avLst/>
@@ -7019,7 +7134,7 @@
               </a:spcAft>
             </a:pPr>
             <a:r>
-              <a:rPr sz="1200" b="0">
+              <a:rPr sz="1050" b="0">
                 <a:solidFill>
                   <a:srgbClr val="1A1A1A"/>
                 </a:solidFill>
@@ -7038,8 +7153,8 @@
         </p:nvSpPr>
         <p:spPr>
           <a:xfrm>
-            <a:off x="841248" y="5084064"/>
-            <a:ext cx="5715000" cy="530352"/>
+            <a:off x="841248" y="4864607"/>
+            <a:ext cx="4160520" cy="475488"/>
           </a:xfrm>
           <a:prstGeom prst="roundRect">
             <a:avLst>
@@ -7094,8 +7209,8 @@
         </p:blipFill>
         <p:spPr>
           <a:xfrm>
-            <a:off x="987552" y="5230368"/>
-            <a:ext cx="237744" cy="237744"/>
+            <a:off x="969264" y="5001767"/>
+            <a:ext cx="201168" cy="201168"/>
           </a:xfrm>
           <a:prstGeom prst="rect">
             <a:avLst/>
@@ -7110,8 +7225,8 @@
         </p:nvSpPr>
         <p:spPr>
           <a:xfrm>
-            <a:off x="1353312" y="5084064"/>
-            <a:ext cx="5029200" cy="530352"/>
+            <a:off x="1280160" y="4864607"/>
+            <a:ext cx="3593591" cy="475488"/>
           </a:xfrm>
           <a:prstGeom prst="rect">
             <a:avLst/>
@@ -7136,7 +7251,7 @@
               </a:spcAft>
             </a:pPr>
             <a:r>
-              <a:rPr sz="1200" b="0">
+              <a:rPr sz="1050" b="0">
                 <a:solidFill>
                   <a:srgbClr val="1A1A1A"/>
                 </a:solidFill>
@@ -7155,8 +7270,8 @@
         </p:nvSpPr>
         <p:spPr>
           <a:xfrm>
-            <a:off x="6812280" y="2670048"/>
-            <a:ext cx="4538167" cy="2944368"/>
+            <a:off x="5385816" y="2856654"/>
+            <a:ext cx="5964631" cy="2369986"/>
           </a:xfrm>
           <a:prstGeom prst="roundRect">
             <a:avLst>
@@ -7195,100 +7310,9 @@
           </a:p>
         </p:txBody>
       </p:sp>
-      <p:sp>
-        <p:nvSpPr>
-          <p:cNvPr id="23" name="Rounded Rectangle 22"/>
-          <p:cNvSpPr/>
-          <p:nvPr/>
-        </p:nvSpPr>
-        <p:spPr>
-          <a:xfrm>
-            <a:off x="7013448" y="2871216"/>
-            <a:ext cx="1298448" cy="310896"/>
-          </a:xfrm>
-          <a:prstGeom prst="roundRect">
-            <a:avLst>
-              <a:gd name="adj" fmla="val 50000"/>
-            </a:avLst>
-          </a:prstGeom>
-          <a:solidFill>
-            <a:srgbClr val="FCECEC"/>
-          </a:solidFill>
-          <a:ln>
-            <a:noFill/>
-          </a:ln>
-          <a:effectLst/>
-        </p:spPr>
-        <p:style>
-          <a:lnRef idx="1">
-            <a:schemeClr val="accent1"/>
-          </a:lnRef>
-          <a:fillRef idx="3">
-            <a:schemeClr val="accent1"/>
-          </a:fillRef>
-          <a:effectRef idx="2">
-            <a:schemeClr val="accent1"/>
-          </a:effectRef>
-          <a:fontRef idx="minor">
-            <a:schemeClr val="lt1"/>
-          </a:fontRef>
-        </p:style>
-        <p:txBody>
-          <a:bodyPr rtlCol="0" anchor="ctr"/>
-          <a:lstStyle/>
-          <a:p>
-            <a:pPr algn="ctr"/>
-          </a:p>
-        </p:txBody>
-      </p:sp>
-      <p:sp>
-        <p:nvSpPr>
-          <p:cNvPr id="24" name="TextBox 23"/>
-          <p:cNvSpPr txBox="1"/>
-          <p:nvPr/>
-        </p:nvSpPr>
-        <p:spPr>
-          <a:xfrm>
-            <a:off x="7013448" y="2871216"/>
-            <a:ext cx="1298448" cy="310896"/>
-          </a:xfrm>
-          <a:prstGeom prst="rect">
-            <a:avLst/>
-          </a:prstGeom>
-          <a:noFill/>
-        </p:spPr>
-        <p:txBody>
-          <a:bodyPr wrap="none" anchor="ctr" lIns="0" rIns="0" tIns="0" bIns="0">
-            <a:spAutoFit/>
-          </a:bodyPr>
-          <a:lstStyle/>
-          <a:p>
-            <a:pPr algn="ctr">
-              <a:lnSpc>
-                <a:spcPct val="106000"/>
-              </a:lnSpc>
-              <a:spcBef>
-                <a:spcPts val="0"/>
-              </a:spcBef>
-              <a:spcAft>
-                <a:spcPts val="0"/>
-              </a:spcAft>
-            </a:pPr>
-            <a:r>
-              <a:rPr sz="850" b="1">
-                <a:solidFill>
-                  <a:srgbClr val="B80000"/>
-                </a:solidFill>
-                <a:latin typeface="Red Hat Display"/>
-              </a:rPr>
-              <a:t>MEDIA PASS</a:t>
-            </a:r>
-          </a:p>
-        </p:txBody>
-      </p:sp>
       <p:pic>
         <p:nvPicPr>
-          <p:cNvPr id="25" name="Picture 24" descr="eye_slate.png"/>
+          <p:cNvPr id="23" name="Picture 22" descr="01-request-driven-compute.png"/>
           <p:cNvPicPr>
             <a:picLocks noChangeAspect="1"/>
           </p:cNvPicPr>
@@ -7302,62 +7326,17 @@
         </p:blipFill>
         <p:spPr>
           <a:xfrm>
-            <a:off x="8843619" y="3383280"/>
-            <a:ext cx="475488" cy="475488"/>
+            <a:off x="5532120" y="3002958"/>
+            <a:ext cx="5672023" cy="2077378"/>
           </a:xfrm>
           <a:prstGeom prst="rect">
             <a:avLst/>
           </a:prstGeom>
         </p:spPr>
       </p:pic>
-      <p:sp>
-        <p:nvSpPr>
-          <p:cNvPr id="26" name="TextBox 25"/>
-          <p:cNvSpPr txBox="1"/>
-          <p:nvPr/>
-        </p:nvSpPr>
-        <p:spPr>
-          <a:xfrm>
-            <a:off x="7050024" y="3995928"/>
-            <a:ext cx="4062679" cy="1481328"/>
-          </a:xfrm>
-          <a:prstGeom prst="rect">
-            <a:avLst/>
-          </a:prstGeom>
-          <a:noFill/>
-        </p:spPr>
-        <p:txBody>
-          <a:bodyPr wrap="square" anchor="t" lIns="0" rIns="0" tIns="0" bIns="0">
-            <a:spAutoFit/>
-          </a:bodyPr>
-          <a:lstStyle/>
-          <a:p>
-            <a:pPr algn="l">
-              <a:lnSpc>
-                <a:spcPct val="120000"/>
-              </a:lnSpc>
-              <a:spcBef>
-                <a:spcPts val="0"/>
-              </a:spcBef>
-              <a:spcAft>
-                <a:spcPts val="0"/>
-              </a:spcAft>
-            </a:pPr>
-            <a:r>
-              <a:rPr sz="950" b="0">
-                <a:solidFill>
-                  <a:srgbClr val="8A9099"/>
-                </a:solidFill>
-                <a:latin typeface="Red Hat Text"/>
-              </a:rPr>
-              <a:t>Reuse the concept diagram serverless-zero-to-hero-...-01-request-driven-compute.svg — the Configuration minting revisions, the Route splitting weight over v1 (#stable) and v2 (#candidate), the KPA scaling each 0..N.</a:t>
-            </a:r>
-          </a:p>
-        </p:txBody>
-      </p:sp>
       <p:cxnSp>
         <p:nvCxnSpPr>
-          <p:cNvPr id="27" name="Connector 26"/>
+          <p:cNvPr id="24" name="Connector 23"/>
           <p:cNvCxnSpPr/>
           <p:nvPr/>
         </p:nvCxnSpPr>
@@ -7393,7 +7372,7 @@
       </p:cxnSp>
       <p:sp>
         <p:nvSpPr>
-          <p:cNvPr id="28" name="TextBox 27"/>
+          <p:cNvPr id="25" name="TextBox 24"/>
           <p:cNvSpPr txBox="1"/>
           <p:nvPr/>
         </p:nvSpPr>
@@ -7438,7 +7417,7 @@
       </p:sp>
       <p:sp>
         <p:nvSpPr>
-          <p:cNvPr id="29" name="TextBox 28"/>
+          <p:cNvPr id="26" name="TextBox 25"/>
           <p:cNvSpPr txBox="1"/>
           <p:nvPr/>
         </p:nvSpPr>
@@ -7703,11 +7682,11 @@
         <p:spPr>
           <a:xfrm>
             <a:off x="841248" y="2670048"/>
-            <a:ext cx="5715000" cy="530352"/>
+            <a:ext cx="5138928" cy="786384"/>
           </a:xfrm>
           <a:prstGeom prst="roundRect">
             <a:avLst>
-              <a:gd name="adj" fmla="val 6000"/>
+              <a:gd name="adj" fmla="val 7000"/>
             </a:avLst>
           </a:prstGeom>
           <a:solidFill>
@@ -7742,9 +7721,55 @@
           </a:p>
         </p:txBody>
       </p:sp>
+      <p:sp>
+        <p:nvSpPr>
+          <p:cNvPr id="8" name="Rounded Rectangle 7"/>
+          <p:cNvSpPr/>
+          <p:nvPr/>
+        </p:nvSpPr>
+        <p:spPr>
+          <a:xfrm>
+            <a:off x="987552" y="2807208"/>
+            <a:ext cx="512064" cy="512064"/>
+          </a:xfrm>
+          <a:prstGeom prst="roundRect">
+            <a:avLst>
+              <a:gd name="adj" fmla="val 26000"/>
+            </a:avLst>
+          </a:prstGeom>
+          <a:solidFill>
+            <a:srgbClr val="EE0000"/>
+          </a:solidFill>
+          <a:ln>
+            <a:noFill/>
+          </a:ln>
+          <a:effectLst/>
+        </p:spPr>
+        <p:style>
+          <a:lnRef idx="1">
+            <a:schemeClr val="accent1"/>
+          </a:lnRef>
+          <a:fillRef idx="3">
+            <a:schemeClr val="accent1"/>
+          </a:fillRef>
+          <a:effectRef idx="2">
+            <a:schemeClr val="accent1"/>
+          </a:effectRef>
+          <a:fontRef idx="minor">
+            <a:schemeClr val="lt1"/>
+          </a:fontRef>
+        </p:style>
+        <p:txBody>
+          <a:bodyPr rtlCol="0" anchor="ctr"/>
+          <a:lstStyle/>
+          <a:p>
+            <a:pPr algn="ctr"/>
+          </a:p>
+        </p:txBody>
+      </p:sp>
       <p:pic>
         <p:nvPicPr>
-          <p:cNvPr id="8" name="Picture 7" descr="check_steel.png"/>
+          <p:cNvPr id="9" name="Picture 8" descr="check_white.png"/>
           <p:cNvPicPr>
             <a:picLocks noChangeAspect="1"/>
           </p:cNvPicPr>
@@ -7758,8 +7783,8 @@
         </p:blipFill>
         <p:spPr>
           <a:xfrm>
-            <a:off x="987552" y="2816352"/>
-            <a:ext cx="237744" cy="237744"/>
+            <a:off x="1110447" y="2930103"/>
+            <a:ext cx="266273" cy="266273"/>
           </a:xfrm>
           <a:prstGeom prst="rect">
             <a:avLst/>
@@ -7768,14 +7793,14 @@
       </p:pic>
       <p:sp>
         <p:nvSpPr>
-          <p:cNvPr id="9" name="TextBox 8"/>
+          <p:cNvPr id="10" name="TextBox 9"/>
           <p:cNvSpPr txBox="1"/>
           <p:nvPr/>
         </p:nvSpPr>
         <p:spPr>
           <a:xfrm>
-            <a:off x="1353312" y="2670048"/>
-            <a:ext cx="5029200" cy="530352"/>
+            <a:off x="1627632" y="2670048"/>
+            <a:ext cx="4206240" cy="786384"/>
           </a:xfrm>
           <a:prstGeom prst="rect">
             <a:avLst/>
@@ -7800,7 +7825,7 @@
               </a:spcAft>
             </a:pPr>
             <a:r>
-              <a:rPr sz="1200" b="0">
+              <a:rPr sz="1150" b="0">
                 <a:solidFill>
                   <a:srgbClr val="1A1A1A"/>
                 </a:solidFill>
@@ -7813,18 +7838,18 @@
       </p:sp>
       <p:sp>
         <p:nvSpPr>
-          <p:cNvPr id="10" name="Rounded Rectangle 9"/>
+          <p:cNvPr id="11" name="Rounded Rectangle 10"/>
           <p:cNvSpPr/>
           <p:nvPr/>
         </p:nvSpPr>
         <p:spPr>
           <a:xfrm>
-            <a:off x="841248" y="3273552"/>
-            <a:ext cx="5715000" cy="530352"/>
+            <a:off x="6254496" y="2670048"/>
+            <a:ext cx="5138928" cy="786384"/>
           </a:xfrm>
           <a:prstGeom prst="roundRect">
             <a:avLst>
-              <a:gd name="adj" fmla="val 6000"/>
+              <a:gd name="adj" fmla="val 7000"/>
             </a:avLst>
           </a:prstGeom>
           <a:solidFill>
@@ -7859,9 +7884,55 @@
           </a:p>
         </p:txBody>
       </p:sp>
+      <p:sp>
+        <p:nvSpPr>
+          <p:cNvPr id="12" name="Rounded Rectangle 11"/>
+          <p:cNvSpPr/>
+          <p:nvPr/>
+        </p:nvSpPr>
+        <p:spPr>
+          <a:xfrm>
+            <a:off x="6400800" y="2807208"/>
+            <a:ext cx="512064" cy="512064"/>
+          </a:xfrm>
+          <a:prstGeom prst="roundRect">
+            <a:avLst>
+              <a:gd name="adj" fmla="val 26000"/>
+            </a:avLst>
+          </a:prstGeom>
+          <a:solidFill>
+            <a:srgbClr val="EE0000"/>
+          </a:solidFill>
+          <a:ln>
+            <a:noFill/>
+          </a:ln>
+          <a:effectLst/>
+        </p:spPr>
+        <p:style>
+          <a:lnRef idx="1">
+            <a:schemeClr val="accent1"/>
+          </a:lnRef>
+          <a:fillRef idx="3">
+            <a:schemeClr val="accent1"/>
+          </a:fillRef>
+          <a:effectRef idx="2">
+            <a:schemeClr val="accent1"/>
+          </a:effectRef>
+          <a:fontRef idx="minor">
+            <a:schemeClr val="lt1"/>
+          </a:fontRef>
+        </p:style>
+        <p:txBody>
+          <a:bodyPr rtlCol="0" anchor="ctr"/>
+          <a:lstStyle/>
+          <a:p>
+            <a:pPr algn="ctr"/>
+          </a:p>
+        </p:txBody>
+      </p:sp>
       <p:pic>
         <p:nvPicPr>
-          <p:cNvPr id="11" name="Picture 10" descr="check_steel.png"/>
+          <p:cNvPr id="13" name="Picture 12" descr="check_white.png"/>
           <p:cNvPicPr>
             <a:picLocks noChangeAspect="1"/>
           </p:cNvPicPr>
@@ -7875,8 +7946,8 @@
         </p:blipFill>
         <p:spPr>
           <a:xfrm>
-            <a:off x="987552" y="3419856"/>
-            <a:ext cx="237744" cy="237744"/>
+            <a:off x="6523695" y="2930103"/>
+            <a:ext cx="266273" cy="266273"/>
           </a:xfrm>
           <a:prstGeom prst="rect">
             <a:avLst/>
@@ -7885,14 +7956,14 @@
       </p:pic>
       <p:sp>
         <p:nvSpPr>
-          <p:cNvPr id="12" name="TextBox 11"/>
+          <p:cNvPr id="14" name="TextBox 13"/>
           <p:cNvSpPr txBox="1"/>
           <p:nvPr/>
         </p:nvSpPr>
         <p:spPr>
           <a:xfrm>
-            <a:off x="1353312" y="3273552"/>
-            <a:ext cx="5029200" cy="530352"/>
+            <a:off x="7040880" y="2670048"/>
+            <a:ext cx="4206240" cy="786384"/>
           </a:xfrm>
           <a:prstGeom prst="rect">
             <a:avLst/>
@@ -7917,7 +7988,7 @@
               </a:spcAft>
             </a:pPr>
             <a:r>
-              <a:rPr sz="1200" b="0">
+              <a:rPr sz="1150" b="0">
                 <a:solidFill>
                   <a:srgbClr val="1A1A1A"/>
                 </a:solidFill>
@@ -7930,18 +8001,18 @@
       </p:sp>
       <p:sp>
         <p:nvSpPr>
-          <p:cNvPr id="13" name="Rounded Rectangle 12"/>
+          <p:cNvPr id="15" name="Rounded Rectangle 14"/>
           <p:cNvSpPr/>
           <p:nvPr/>
         </p:nvSpPr>
         <p:spPr>
           <a:xfrm>
-            <a:off x="841248" y="3877056"/>
-            <a:ext cx="5715000" cy="530352"/>
+            <a:off x="841248" y="3602736"/>
+            <a:ext cx="5138928" cy="786384"/>
           </a:xfrm>
           <a:prstGeom prst="roundRect">
             <a:avLst>
-              <a:gd name="adj" fmla="val 6000"/>
+              <a:gd name="adj" fmla="val 7000"/>
             </a:avLst>
           </a:prstGeom>
           <a:solidFill>
@@ -7976,9 +8047,55 @@
           </a:p>
         </p:txBody>
       </p:sp>
+      <p:sp>
+        <p:nvSpPr>
+          <p:cNvPr id="16" name="Rounded Rectangle 15"/>
+          <p:cNvSpPr/>
+          <p:nvPr/>
+        </p:nvSpPr>
+        <p:spPr>
+          <a:xfrm>
+            <a:off x="987552" y="3739896"/>
+            <a:ext cx="512064" cy="512064"/>
+          </a:xfrm>
+          <a:prstGeom prst="roundRect">
+            <a:avLst>
+              <a:gd name="adj" fmla="val 26000"/>
+            </a:avLst>
+          </a:prstGeom>
+          <a:solidFill>
+            <a:srgbClr val="EE0000"/>
+          </a:solidFill>
+          <a:ln>
+            <a:noFill/>
+          </a:ln>
+          <a:effectLst/>
+        </p:spPr>
+        <p:style>
+          <a:lnRef idx="1">
+            <a:schemeClr val="accent1"/>
+          </a:lnRef>
+          <a:fillRef idx="3">
+            <a:schemeClr val="accent1"/>
+          </a:fillRef>
+          <a:effectRef idx="2">
+            <a:schemeClr val="accent1"/>
+          </a:effectRef>
+          <a:fontRef idx="minor">
+            <a:schemeClr val="lt1"/>
+          </a:fontRef>
+        </p:style>
+        <p:txBody>
+          <a:bodyPr rtlCol="0" anchor="ctr"/>
+          <a:lstStyle/>
+          <a:p>
+            <a:pPr algn="ctr"/>
+          </a:p>
+        </p:txBody>
+      </p:sp>
       <p:pic>
         <p:nvPicPr>
-          <p:cNvPr id="14" name="Picture 13" descr="check_steel.png"/>
+          <p:cNvPr id="17" name="Picture 16" descr="check_white.png"/>
           <p:cNvPicPr>
             <a:picLocks noChangeAspect="1"/>
           </p:cNvPicPr>
@@ -7992,8 +8109,8 @@
         </p:blipFill>
         <p:spPr>
           <a:xfrm>
-            <a:off x="987552" y="4023360"/>
-            <a:ext cx="237744" cy="237744"/>
+            <a:off x="1110447" y="3862791"/>
+            <a:ext cx="266273" cy="266273"/>
           </a:xfrm>
           <a:prstGeom prst="rect">
             <a:avLst/>
@@ -8002,14 +8119,14 @@
       </p:pic>
       <p:sp>
         <p:nvSpPr>
-          <p:cNvPr id="15" name="TextBox 14"/>
+          <p:cNvPr id="18" name="TextBox 17"/>
           <p:cNvSpPr txBox="1"/>
           <p:nvPr/>
         </p:nvSpPr>
         <p:spPr>
           <a:xfrm>
-            <a:off x="1353312" y="3877056"/>
-            <a:ext cx="5029200" cy="530352"/>
+            <a:off x="1627632" y="3602736"/>
+            <a:ext cx="4206240" cy="786384"/>
           </a:xfrm>
           <a:prstGeom prst="rect">
             <a:avLst/>
@@ -8034,7 +8151,7 @@
               </a:spcAft>
             </a:pPr>
             <a:r>
-              <a:rPr sz="1200" b="0">
+              <a:rPr sz="1150" b="0">
                 <a:solidFill>
                   <a:srgbClr val="1A1A1A"/>
                 </a:solidFill>
@@ -8047,18 +8164,18 @@
       </p:sp>
       <p:sp>
         <p:nvSpPr>
-          <p:cNvPr id="16" name="Rounded Rectangle 15"/>
+          <p:cNvPr id="19" name="Rounded Rectangle 18"/>
           <p:cNvSpPr/>
           <p:nvPr/>
         </p:nvSpPr>
         <p:spPr>
           <a:xfrm>
-            <a:off x="841248" y="4480560"/>
-            <a:ext cx="5715000" cy="530352"/>
+            <a:off x="6254496" y="3602736"/>
+            <a:ext cx="5138928" cy="786384"/>
           </a:xfrm>
           <a:prstGeom prst="roundRect">
             <a:avLst>
-              <a:gd name="adj" fmla="val 6000"/>
+              <a:gd name="adj" fmla="val 7000"/>
             </a:avLst>
           </a:prstGeom>
           <a:solidFill>
@@ -8093,9 +8210,55 @@
           </a:p>
         </p:txBody>
       </p:sp>
+      <p:sp>
+        <p:nvSpPr>
+          <p:cNvPr id="20" name="Rounded Rectangle 19"/>
+          <p:cNvSpPr/>
+          <p:nvPr/>
+        </p:nvSpPr>
+        <p:spPr>
+          <a:xfrm>
+            <a:off x="6400800" y="3739896"/>
+            <a:ext cx="512064" cy="512064"/>
+          </a:xfrm>
+          <a:prstGeom prst="roundRect">
+            <a:avLst>
+              <a:gd name="adj" fmla="val 26000"/>
+            </a:avLst>
+          </a:prstGeom>
+          <a:solidFill>
+            <a:srgbClr val="EE0000"/>
+          </a:solidFill>
+          <a:ln>
+            <a:noFill/>
+          </a:ln>
+          <a:effectLst/>
+        </p:spPr>
+        <p:style>
+          <a:lnRef idx="1">
+            <a:schemeClr val="accent1"/>
+          </a:lnRef>
+          <a:fillRef idx="3">
+            <a:schemeClr val="accent1"/>
+          </a:fillRef>
+          <a:effectRef idx="2">
+            <a:schemeClr val="accent1"/>
+          </a:effectRef>
+          <a:fontRef idx="minor">
+            <a:schemeClr val="lt1"/>
+          </a:fontRef>
+        </p:style>
+        <p:txBody>
+          <a:bodyPr rtlCol="0" anchor="ctr"/>
+          <a:lstStyle/>
+          <a:p>
+            <a:pPr algn="ctr"/>
+          </a:p>
+        </p:txBody>
+      </p:sp>
       <p:pic>
         <p:nvPicPr>
-          <p:cNvPr id="17" name="Picture 16" descr="check_steel.png"/>
+          <p:cNvPr id="21" name="Picture 20" descr="check_white.png"/>
           <p:cNvPicPr>
             <a:picLocks noChangeAspect="1"/>
           </p:cNvPicPr>
@@ -8109,8 +8272,8 @@
         </p:blipFill>
         <p:spPr>
           <a:xfrm>
-            <a:off x="987552" y="4626864"/>
-            <a:ext cx="237744" cy="237744"/>
+            <a:off x="6523695" y="3862791"/>
+            <a:ext cx="266273" cy="266273"/>
           </a:xfrm>
           <a:prstGeom prst="rect">
             <a:avLst/>
@@ -8119,14 +8282,14 @@
       </p:pic>
       <p:sp>
         <p:nvSpPr>
-          <p:cNvPr id="18" name="TextBox 17"/>
+          <p:cNvPr id="22" name="TextBox 21"/>
           <p:cNvSpPr txBox="1"/>
           <p:nvPr/>
         </p:nvSpPr>
         <p:spPr>
           <a:xfrm>
-            <a:off x="1353312" y="4480560"/>
-            <a:ext cx="5029200" cy="530352"/>
+            <a:off x="7040880" y="3602736"/>
+            <a:ext cx="4206240" cy="786384"/>
           </a:xfrm>
           <a:prstGeom prst="rect">
             <a:avLst/>
@@ -8151,7 +8314,7 @@
               </a:spcAft>
             </a:pPr>
             <a:r>
-              <a:rPr sz="1200" b="0">
+              <a:rPr sz="1150" b="0">
                 <a:solidFill>
                   <a:srgbClr val="1A1A1A"/>
                 </a:solidFill>
@@ -8164,18 +8327,18 @@
       </p:sp>
       <p:sp>
         <p:nvSpPr>
-          <p:cNvPr id="19" name="Rounded Rectangle 18"/>
+          <p:cNvPr id="23" name="Rounded Rectangle 22"/>
           <p:cNvSpPr/>
           <p:nvPr/>
         </p:nvSpPr>
         <p:spPr>
           <a:xfrm>
-            <a:off x="841248" y="5084064"/>
-            <a:ext cx="5715000" cy="530352"/>
+            <a:off x="841248" y="4535424"/>
+            <a:ext cx="5138928" cy="786384"/>
           </a:xfrm>
           <a:prstGeom prst="roundRect">
             <a:avLst>
-              <a:gd name="adj" fmla="val 6000"/>
+              <a:gd name="adj" fmla="val 7000"/>
             </a:avLst>
           </a:prstGeom>
           <a:solidFill>
@@ -8210,9 +8373,55 @@
           </a:p>
         </p:txBody>
       </p:sp>
+      <p:sp>
+        <p:nvSpPr>
+          <p:cNvPr id="24" name="Rounded Rectangle 23"/>
+          <p:cNvSpPr/>
+          <p:nvPr/>
+        </p:nvSpPr>
+        <p:spPr>
+          <a:xfrm>
+            <a:off x="987552" y="4672584"/>
+            <a:ext cx="512064" cy="512064"/>
+          </a:xfrm>
+          <a:prstGeom prst="roundRect">
+            <a:avLst>
+              <a:gd name="adj" fmla="val 26000"/>
+            </a:avLst>
+          </a:prstGeom>
+          <a:solidFill>
+            <a:srgbClr val="EE0000"/>
+          </a:solidFill>
+          <a:ln>
+            <a:noFill/>
+          </a:ln>
+          <a:effectLst/>
+        </p:spPr>
+        <p:style>
+          <a:lnRef idx="1">
+            <a:schemeClr val="accent1"/>
+          </a:lnRef>
+          <a:fillRef idx="3">
+            <a:schemeClr val="accent1"/>
+          </a:fillRef>
+          <a:effectRef idx="2">
+            <a:schemeClr val="accent1"/>
+          </a:effectRef>
+          <a:fontRef idx="minor">
+            <a:schemeClr val="lt1"/>
+          </a:fontRef>
+        </p:style>
+        <p:txBody>
+          <a:bodyPr rtlCol="0" anchor="ctr"/>
+          <a:lstStyle/>
+          <a:p>
+            <a:pPr algn="ctr"/>
+          </a:p>
+        </p:txBody>
+      </p:sp>
       <p:pic>
         <p:nvPicPr>
-          <p:cNvPr id="20" name="Picture 19" descr="check_steel.png"/>
+          <p:cNvPr id="25" name="Picture 24" descr="check_white.png"/>
           <p:cNvPicPr>
             <a:picLocks noChangeAspect="1"/>
           </p:cNvPicPr>
@@ -8226,8 +8435,8 @@
         </p:blipFill>
         <p:spPr>
           <a:xfrm>
-            <a:off x="987552" y="5230368"/>
-            <a:ext cx="237744" cy="237744"/>
+            <a:off x="1110447" y="4795479"/>
+            <a:ext cx="266273" cy="266273"/>
           </a:xfrm>
           <a:prstGeom prst="rect">
             <a:avLst/>
@@ -8236,14 +8445,14 @@
       </p:pic>
       <p:sp>
         <p:nvSpPr>
-          <p:cNvPr id="21" name="TextBox 20"/>
+          <p:cNvPr id="26" name="TextBox 25"/>
           <p:cNvSpPr txBox="1"/>
           <p:nvPr/>
         </p:nvSpPr>
         <p:spPr>
           <a:xfrm>
-            <a:off x="1353312" y="5084064"/>
-            <a:ext cx="5029200" cy="530352"/>
+            <a:off x="1627632" y="4535424"/>
+            <a:ext cx="4206240" cy="786384"/>
           </a:xfrm>
           <a:prstGeom prst="rect">
             <a:avLst/>
@@ -8268,221 +8477,13 @@
               </a:spcAft>
             </a:pPr>
             <a:r>
-              <a:rPr sz="1200" b="0">
+              <a:rPr sz="1150" b="0">
                 <a:solidFill>
                   <a:srgbClr val="1A1A1A"/>
                 </a:solidFill>
                 <a:latin typeface="Red Hat Text"/>
               </a:rPr>
               <a:t>Plan for it: min-scale for a warm floor, or a native build (tens of ms)</a:t>
-            </a:r>
-          </a:p>
-        </p:txBody>
-      </p:sp>
-      <p:sp>
-        <p:nvSpPr>
-          <p:cNvPr id="22" name="Rounded Rectangle 21"/>
-          <p:cNvSpPr/>
-          <p:nvPr/>
-        </p:nvSpPr>
-        <p:spPr>
-          <a:xfrm>
-            <a:off x="6812280" y="2670048"/>
-            <a:ext cx="4538167" cy="2944368"/>
-          </a:xfrm>
-          <a:prstGeom prst="roundRect">
-            <a:avLst>
-              <a:gd name="adj" fmla="val 4000"/>
-            </a:avLst>
-          </a:prstGeom>
-          <a:solidFill>
-            <a:srgbClr val="FFFFFF"/>
-          </a:solidFill>
-          <a:ln w="15240">
-            <a:solidFill>
-              <a:srgbClr val="DDE1E6"/>
-            </a:solidFill>
-          </a:ln>
-          <a:effectLst/>
-        </p:spPr>
-        <p:style>
-          <a:lnRef idx="1">
-            <a:schemeClr val="accent1"/>
-          </a:lnRef>
-          <a:fillRef idx="3">
-            <a:schemeClr val="accent1"/>
-          </a:fillRef>
-          <a:effectRef idx="2">
-            <a:schemeClr val="accent1"/>
-          </a:effectRef>
-          <a:fontRef idx="minor">
-            <a:schemeClr val="lt1"/>
-          </a:fontRef>
-        </p:style>
-        <p:txBody>
-          <a:bodyPr rtlCol="0" anchor="ctr"/>
-          <a:lstStyle/>
-          <a:p>
-            <a:pPr algn="ctr"/>
-          </a:p>
-        </p:txBody>
-      </p:sp>
-      <p:sp>
-        <p:nvSpPr>
-          <p:cNvPr id="23" name="Rounded Rectangle 22"/>
-          <p:cNvSpPr/>
-          <p:nvPr/>
-        </p:nvSpPr>
-        <p:spPr>
-          <a:xfrm>
-            <a:off x="7013448" y="2871216"/>
-            <a:ext cx="1298448" cy="310896"/>
-          </a:xfrm>
-          <a:prstGeom prst="roundRect">
-            <a:avLst>
-              <a:gd name="adj" fmla="val 50000"/>
-            </a:avLst>
-          </a:prstGeom>
-          <a:solidFill>
-            <a:srgbClr val="FCECEC"/>
-          </a:solidFill>
-          <a:ln>
-            <a:noFill/>
-          </a:ln>
-          <a:effectLst/>
-        </p:spPr>
-        <p:style>
-          <a:lnRef idx="1">
-            <a:schemeClr val="accent1"/>
-          </a:lnRef>
-          <a:fillRef idx="3">
-            <a:schemeClr val="accent1"/>
-          </a:fillRef>
-          <a:effectRef idx="2">
-            <a:schemeClr val="accent1"/>
-          </a:effectRef>
-          <a:fontRef idx="minor">
-            <a:schemeClr val="lt1"/>
-          </a:fontRef>
-        </p:style>
-        <p:txBody>
-          <a:bodyPr rtlCol="0" anchor="ctr"/>
-          <a:lstStyle/>
-          <a:p>
-            <a:pPr algn="ctr"/>
-          </a:p>
-        </p:txBody>
-      </p:sp>
-      <p:sp>
-        <p:nvSpPr>
-          <p:cNvPr id="24" name="TextBox 23"/>
-          <p:cNvSpPr txBox="1"/>
-          <p:nvPr/>
-        </p:nvSpPr>
-        <p:spPr>
-          <a:xfrm>
-            <a:off x="7013448" y="2871216"/>
-            <a:ext cx="1298448" cy="310896"/>
-          </a:xfrm>
-          <a:prstGeom prst="rect">
-            <a:avLst/>
-          </a:prstGeom>
-          <a:noFill/>
-        </p:spPr>
-        <p:txBody>
-          <a:bodyPr wrap="none" anchor="ctr" lIns="0" rIns="0" tIns="0" bIns="0">
-            <a:spAutoFit/>
-          </a:bodyPr>
-          <a:lstStyle/>
-          <a:p>
-            <a:pPr algn="ctr">
-              <a:lnSpc>
-                <a:spcPct val="106000"/>
-              </a:lnSpc>
-              <a:spcBef>
-                <a:spcPts val="0"/>
-              </a:spcBef>
-              <a:spcAft>
-                <a:spcPts val="0"/>
-              </a:spcAft>
-            </a:pPr>
-            <a:r>
-              <a:rPr sz="850" b="1">
-                <a:solidFill>
-                  <a:srgbClr val="B80000"/>
-                </a:solidFill>
-                <a:latin typeface="Red Hat Display"/>
-              </a:rPr>
-              <a:t>MEDIA PASS</a:t>
-            </a:r>
-          </a:p>
-        </p:txBody>
-      </p:sp>
-      <p:pic>
-        <p:nvPicPr>
-          <p:cNvPr id="25" name="Picture 24" descr="eye_slate.png"/>
-          <p:cNvPicPr>
-            <a:picLocks noChangeAspect="1"/>
-          </p:cNvPicPr>
-          <p:nvPr/>
-        </p:nvPicPr>
-        <p:blipFill>
-          <a:blip r:embed="rId4"/>
-          <a:stretch>
-            <a:fillRect/>
-          </a:stretch>
-        </p:blipFill>
-        <p:spPr>
-          <a:xfrm>
-            <a:off x="8843619" y="3383280"/>
-            <a:ext cx="475488" cy="475488"/>
-          </a:xfrm>
-          <a:prstGeom prst="rect">
-            <a:avLst/>
-          </a:prstGeom>
-        </p:spPr>
-      </p:pic>
-      <p:sp>
-        <p:nvSpPr>
-          <p:cNvPr id="26" name="TextBox 25"/>
-          <p:cNvSpPr txBox="1"/>
-          <p:nvPr/>
-        </p:nvSpPr>
-        <p:spPr>
-          <a:xfrm>
-            <a:off x="7050024" y="3995928"/>
-            <a:ext cx="4062679" cy="1481328"/>
-          </a:xfrm>
-          <a:prstGeom prst="rect">
-            <a:avLst/>
-          </a:prstGeom>
-          <a:noFill/>
-        </p:spPr>
-        <p:txBody>
-          <a:bodyPr wrap="square" anchor="t" lIns="0" rIns="0" tIns="0" bIns="0">
-            <a:spAutoFit/>
-          </a:bodyPr>
-          <a:lstStyle/>
-          <a:p>
-            <a:pPr algn="l">
-              <a:lnSpc>
-                <a:spcPct val="120000"/>
-              </a:lnSpc>
-              <a:spcBef>
-                <a:spcPts val="0"/>
-              </a:spcBef>
-              <a:spcAft>
-                <a:spcPts val="0"/>
-              </a:spcAft>
-            </a:pPr>
-            <a:r>
-              <a:rPr sz="950" b="0">
-                <a:solidFill>
-                  <a:srgbClr val="8A9099"/>
-                </a:solidFill>
-                <a:latin typeface="Red Hat Text"/>
-              </a:rPr>
-              <a:t>A timeline of one request hitting a zero-pod service: activator buffers → pod schedules → JVM boots → response, annotated "~15s cold" — beside a second, warm request annotated "~0.1s"; a callout "min-scale: 1 removes the cold start (gives up scale-to-zero)."</a:t>
             </a:r>
           </a:p>
         </p:txBody>
@@ -8790,11 +8791,11 @@
         <p:spPr>
           <a:xfrm>
             <a:off x="841248" y="2395728"/>
-            <a:ext cx="5715000" cy="530352"/>
+            <a:ext cx="5138928" cy="786384"/>
           </a:xfrm>
           <a:prstGeom prst="roundRect">
             <a:avLst>
-              <a:gd name="adj" fmla="val 6000"/>
+              <a:gd name="adj" fmla="val 7000"/>
             </a:avLst>
           </a:prstGeom>
           <a:solidFill>
@@ -8829,9 +8830,55 @@
           </a:p>
         </p:txBody>
       </p:sp>
+      <p:sp>
+        <p:nvSpPr>
+          <p:cNvPr id="7" name="Rounded Rectangle 6"/>
+          <p:cNvSpPr/>
+          <p:nvPr/>
+        </p:nvSpPr>
+        <p:spPr>
+          <a:xfrm>
+            <a:off x="987552" y="2532888"/>
+            <a:ext cx="512064" cy="512064"/>
+          </a:xfrm>
+          <a:prstGeom prst="roundRect">
+            <a:avLst>
+              <a:gd name="adj" fmla="val 26000"/>
+            </a:avLst>
+          </a:prstGeom>
+          <a:solidFill>
+            <a:srgbClr val="EE0000"/>
+          </a:solidFill>
+          <a:ln>
+            <a:noFill/>
+          </a:ln>
+          <a:effectLst/>
+        </p:spPr>
+        <p:style>
+          <a:lnRef idx="1">
+            <a:schemeClr val="accent1"/>
+          </a:lnRef>
+          <a:fillRef idx="3">
+            <a:schemeClr val="accent1"/>
+          </a:fillRef>
+          <a:effectRef idx="2">
+            <a:schemeClr val="accent1"/>
+          </a:effectRef>
+          <a:fontRef idx="minor">
+            <a:schemeClr val="lt1"/>
+          </a:fontRef>
+        </p:style>
+        <p:txBody>
+          <a:bodyPr rtlCol="0" anchor="ctr"/>
+          <a:lstStyle/>
+          <a:p>
+            <a:pPr algn="ctr"/>
+          </a:p>
+        </p:txBody>
+      </p:sp>
       <p:pic>
         <p:nvPicPr>
-          <p:cNvPr id="7" name="Picture 6" descr="check_steel.png"/>
+          <p:cNvPr id="8" name="Picture 7" descr="check_white.png"/>
           <p:cNvPicPr>
             <a:picLocks noChangeAspect="1"/>
           </p:cNvPicPr>
@@ -8845,8 +8892,8 @@
         </p:blipFill>
         <p:spPr>
           <a:xfrm>
-            <a:off x="987552" y="2542032"/>
-            <a:ext cx="237744" cy="237744"/>
+            <a:off x="1110447" y="2655783"/>
+            <a:ext cx="266273" cy="266273"/>
           </a:xfrm>
           <a:prstGeom prst="rect">
             <a:avLst/>
@@ -8855,14 +8902,14 @@
       </p:pic>
       <p:sp>
         <p:nvSpPr>
-          <p:cNvPr id="8" name="TextBox 7"/>
+          <p:cNvPr id="9" name="TextBox 8"/>
           <p:cNvSpPr txBox="1"/>
           <p:nvPr/>
         </p:nvSpPr>
         <p:spPr>
           <a:xfrm>
-            <a:off x="1353312" y="2395728"/>
-            <a:ext cx="5029200" cy="530352"/>
+            <a:off x="1627632" y="2395728"/>
+            <a:ext cx="4206240" cy="786384"/>
           </a:xfrm>
           <a:prstGeom prst="rect">
             <a:avLst/>
@@ -8887,7 +8934,7 @@
               </a:spcAft>
             </a:pPr>
             <a:r>
-              <a:rPr sz="1200" b="0">
+              <a:rPr sz="1150" b="0">
                 <a:solidFill>
                   <a:srgbClr val="1A1A1A"/>
                 </a:solidFill>
@@ -8900,18 +8947,18 @@
       </p:sp>
       <p:sp>
         <p:nvSpPr>
-          <p:cNvPr id="9" name="Rounded Rectangle 8"/>
+          <p:cNvPr id="10" name="Rounded Rectangle 9"/>
           <p:cNvSpPr/>
           <p:nvPr/>
         </p:nvSpPr>
         <p:spPr>
           <a:xfrm>
-            <a:off x="841248" y="2999232"/>
-            <a:ext cx="5715000" cy="530352"/>
+            <a:off x="6254496" y="2395728"/>
+            <a:ext cx="5138928" cy="786384"/>
           </a:xfrm>
           <a:prstGeom prst="roundRect">
             <a:avLst>
-              <a:gd name="adj" fmla="val 6000"/>
+              <a:gd name="adj" fmla="val 7000"/>
             </a:avLst>
           </a:prstGeom>
           <a:solidFill>
@@ -8946,9 +8993,55 @@
           </a:p>
         </p:txBody>
       </p:sp>
+      <p:sp>
+        <p:nvSpPr>
+          <p:cNvPr id="11" name="Rounded Rectangle 10"/>
+          <p:cNvSpPr/>
+          <p:nvPr/>
+        </p:nvSpPr>
+        <p:spPr>
+          <a:xfrm>
+            <a:off x="6400800" y="2532888"/>
+            <a:ext cx="512064" cy="512064"/>
+          </a:xfrm>
+          <a:prstGeom prst="roundRect">
+            <a:avLst>
+              <a:gd name="adj" fmla="val 26000"/>
+            </a:avLst>
+          </a:prstGeom>
+          <a:solidFill>
+            <a:srgbClr val="EE0000"/>
+          </a:solidFill>
+          <a:ln>
+            <a:noFill/>
+          </a:ln>
+          <a:effectLst/>
+        </p:spPr>
+        <p:style>
+          <a:lnRef idx="1">
+            <a:schemeClr val="accent1"/>
+          </a:lnRef>
+          <a:fillRef idx="3">
+            <a:schemeClr val="accent1"/>
+          </a:fillRef>
+          <a:effectRef idx="2">
+            <a:schemeClr val="accent1"/>
+          </a:effectRef>
+          <a:fontRef idx="minor">
+            <a:schemeClr val="lt1"/>
+          </a:fontRef>
+        </p:style>
+        <p:txBody>
+          <a:bodyPr rtlCol="0" anchor="ctr"/>
+          <a:lstStyle/>
+          <a:p>
+            <a:pPr algn="ctr"/>
+          </a:p>
+        </p:txBody>
+      </p:sp>
       <p:pic>
         <p:nvPicPr>
-          <p:cNvPr id="10" name="Picture 9" descr="check_steel.png"/>
+          <p:cNvPr id="12" name="Picture 11" descr="check_white.png"/>
           <p:cNvPicPr>
             <a:picLocks noChangeAspect="1"/>
           </p:cNvPicPr>
@@ -8962,8 +9055,8 @@
         </p:blipFill>
         <p:spPr>
           <a:xfrm>
-            <a:off x="987552" y="3145536"/>
-            <a:ext cx="237744" cy="237744"/>
+            <a:off x="6523695" y="2655783"/>
+            <a:ext cx="266273" cy="266273"/>
           </a:xfrm>
           <a:prstGeom prst="rect">
             <a:avLst/>
@@ -8972,14 +9065,14 @@
       </p:pic>
       <p:sp>
         <p:nvSpPr>
-          <p:cNvPr id="11" name="TextBox 10"/>
+          <p:cNvPr id="13" name="TextBox 12"/>
           <p:cNvSpPr txBox="1"/>
           <p:nvPr/>
         </p:nvSpPr>
         <p:spPr>
           <a:xfrm>
-            <a:off x="1353312" y="2999232"/>
-            <a:ext cx="5029200" cy="530352"/>
+            <a:off x="7040880" y="2395728"/>
+            <a:ext cx="4206240" cy="786384"/>
           </a:xfrm>
           <a:prstGeom prst="rect">
             <a:avLst/>
@@ -9004,7 +9097,7 @@
               </a:spcAft>
             </a:pPr>
             <a:r>
-              <a:rPr sz="1200" b="0">
+              <a:rPr sz="1150" b="0">
                 <a:solidFill>
                   <a:srgbClr val="1A1A1A"/>
                 </a:solidFill>
@@ -9017,18 +9110,18 @@
       </p:sp>
       <p:sp>
         <p:nvSpPr>
-          <p:cNvPr id="12" name="Rounded Rectangle 11"/>
+          <p:cNvPr id="14" name="Rounded Rectangle 13"/>
           <p:cNvSpPr/>
           <p:nvPr/>
         </p:nvSpPr>
         <p:spPr>
           <a:xfrm>
-            <a:off x="841248" y="3602736"/>
-            <a:ext cx="5715000" cy="530352"/>
+            <a:off x="841248" y="3328416"/>
+            <a:ext cx="5138928" cy="786384"/>
           </a:xfrm>
           <a:prstGeom prst="roundRect">
             <a:avLst>
-              <a:gd name="adj" fmla="val 6000"/>
+              <a:gd name="adj" fmla="val 7000"/>
             </a:avLst>
           </a:prstGeom>
           <a:solidFill>
@@ -9063,9 +9156,55 @@
           </a:p>
         </p:txBody>
       </p:sp>
+      <p:sp>
+        <p:nvSpPr>
+          <p:cNvPr id="15" name="Rounded Rectangle 14"/>
+          <p:cNvSpPr/>
+          <p:nvPr/>
+        </p:nvSpPr>
+        <p:spPr>
+          <a:xfrm>
+            <a:off x="987552" y="3465576"/>
+            <a:ext cx="512064" cy="512064"/>
+          </a:xfrm>
+          <a:prstGeom prst="roundRect">
+            <a:avLst>
+              <a:gd name="adj" fmla="val 26000"/>
+            </a:avLst>
+          </a:prstGeom>
+          <a:solidFill>
+            <a:srgbClr val="EE0000"/>
+          </a:solidFill>
+          <a:ln>
+            <a:noFill/>
+          </a:ln>
+          <a:effectLst/>
+        </p:spPr>
+        <p:style>
+          <a:lnRef idx="1">
+            <a:schemeClr val="accent1"/>
+          </a:lnRef>
+          <a:fillRef idx="3">
+            <a:schemeClr val="accent1"/>
+          </a:fillRef>
+          <a:effectRef idx="2">
+            <a:schemeClr val="accent1"/>
+          </a:effectRef>
+          <a:fontRef idx="minor">
+            <a:schemeClr val="lt1"/>
+          </a:fontRef>
+        </p:style>
+        <p:txBody>
+          <a:bodyPr rtlCol="0" anchor="ctr"/>
+          <a:lstStyle/>
+          <a:p>
+            <a:pPr algn="ctr"/>
+          </a:p>
+        </p:txBody>
+      </p:sp>
       <p:pic>
         <p:nvPicPr>
-          <p:cNvPr id="13" name="Picture 12" descr="check_steel.png"/>
+          <p:cNvPr id="16" name="Picture 15" descr="check_white.png"/>
           <p:cNvPicPr>
             <a:picLocks noChangeAspect="1"/>
           </p:cNvPicPr>
@@ -9079,8 +9218,8 @@
         </p:blipFill>
         <p:spPr>
           <a:xfrm>
-            <a:off x="987552" y="3749040"/>
-            <a:ext cx="237744" cy="237744"/>
+            <a:off x="1110447" y="3588471"/>
+            <a:ext cx="266273" cy="266273"/>
           </a:xfrm>
           <a:prstGeom prst="rect">
             <a:avLst/>
@@ -9089,14 +9228,14 @@
       </p:pic>
       <p:sp>
         <p:nvSpPr>
-          <p:cNvPr id="14" name="TextBox 13"/>
+          <p:cNvPr id="17" name="TextBox 16"/>
           <p:cNvSpPr txBox="1"/>
           <p:nvPr/>
         </p:nvSpPr>
         <p:spPr>
           <a:xfrm>
-            <a:off x="1353312" y="3602736"/>
-            <a:ext cx="5029200" cy="530352"/>
+            <a:off x="1627632" y="3328416"/>
+            <a:ext cx="4206240" cy="786384"/>
           </a:xfrm>
           <a:prstGeom prst="rect">
             <a:avLst/>
@@ -9121,7 +9260,7 @@
               </a:spcAft>
             </a:pPr>
             <a:r>
-              <a:rPr sz="1200" b="0">
+              <a:rPr sz="1150" b="0">
                 <a:solidFill>
                   <a:srgbClr val="1A1A1A"/>
                 </a:solidFill>
@@ -9134,18 +9273,18 @@
       </p:sp>
       <p:sp>
         <p:nvSpPr>
-          <p:cNvPr id="15" name="Rounded Rectangle 14"/>
+          <p:cNvPr id="18" name="Rounded Rectangle 17"/>
           <p:cNvSpPr/>
           <p:nvPr/>
         </p:nvSpPr>
         <p:spPr>
           <a:xfrm>
-            <a:off x="841248" y="4206240"/>
-            <a:ext cx="5715000" cy="530352"/>
+            <a:off x="6254496" y="3328416"/>
+            <a:ext cx="5138928" cy="786384"/>
           </a:xfrm>
           <a:prstGeom prst="roundRect">
             <a:avLst>
-              <a:gd name="adj" fmla="val 6000"/>
+              <a:gd name="adj" fmla="val 7000"/>
             </a:avLst>
           </a:prstGeom>
           <a:solidFill>
@@ -9180,9 +9319,55 @@
           </a:p>
         </p:txBody>
       </p:sp>
+      <p:sp>
+        <p:nvSpPr>
+          <p:cNvPr id="19" name="Rounded Rectangle 18"/>
+          <p:cNvSpPr/>
+          <p:nvPr/>
+        </p:nvSpPr>
+        <p:spPr>
+          <a:xfrm>
+            <a:off x="6400800" y="3465576"/>
+            <a:ext cx="512064" cy="512064"/>
+          </a:xfrm>
+          <a:prstGeom prst="roundRect">
+            <a:avLst>
+              <a:gd name="adj" fmla="val 26000"/>
+            </a:avLst>
+          </a:prstGeom>
+          <a:solidFill>
+            <a:srgbClr val="EE0000"/>
+          </a:solidFill>
+          <a:ln>
+            <a:noFill/>
+          </a:ln>
+          <a:effectLst/>
+        </p:spPr>
+        <p:style>
+          <a:lnRef idx="1">
+            <a:schemeClr val="accent1"/>
+          </a:lnRef>
+          <a:fillRef idx="3">
+            <a:schemeClr val="accent1"/>
+          </a:fillRef>
+          <a:effectRef idx="2">
+            <a:schemeClr val="accent1"/>
+          </a:effectRef>
+          <a:fontRef idx="minor">
+            <a:schemeClr val="lt1"/>
+          </a:fontRef>
+        </p:style>
+        <p:txBody>
+          <a:bodyPr rtlCol="0" anchor="ctr"/>
+          <a:lstStyle/>
+          <a:p>
+            <a:pPr algn="ctr"/>
+          </a:p>
+        </p:txBody>
+      </p:sp>
       <p:pic>
         <p:nvPicPr>
-          <p:cNvPr id="16" name="Picture 15" descr="check_steel.png"/>
+          <p:cNvPr id="20" name="Picture 19" descr="check_white.png"/>
           <p:cNvPicPr>
             <a:picLocks noChangeAspect="1"/>
           </p:cNvPicPr>
@@ -9196,8 +9381,8 @@
         </p:blipFill>
         <p:spPr>
           <a:xfrm>
-            <a:off x="987552" y="4352544"/>
-            <a:ext cx="237744" cy="237744"/>
+            <a:off x="6523695" y="3588471"/>
+            <a:ext cx="266273" cy="266273"/>
           </a:xfrm>
           <a:prstGeom prst="rect">
             <a:avLst/>
@@ -9206,14 +9391,14 @@
       </p:pic>
       <p:sp>
         <p:nvSpPr>
-          <p:cNvPr id="17" name="TextBox 16"/>
+          <p:cNvPr id="21" name="TextBox 20"/>
           <p:cNvSpPr txBox="1"/>
           <p:nvPr/>
         </p:nvSpPr>
         <p:spPr>
           <a:xfrm>
-            <a:off x="1353312" y="4206240"/>
-            <a:ext cx="5029200" cy="530352"/>
+            <a:off x="7040880" y="3328416"/>
+            <a:ext cx="4206240" cy="786384"/>
           </a:xfrm>
           <a:prstGeom prst="rect">
             <a:avLst/>
@@ -9238,7 +9423,7 @@
               </a:spcAft>
             </a:pPr>
             <a:r>
-              <a:rPr sz="1200" b="0">
+              <a:rPr sz="1150" b="0">
                 <a:solidFill>
                   <a:srgbClr val="1A1A1A"/>
                 </a:solidFill>
@@ -9251,18 +9436,18 @@
       </p:sp>
       <p:sp>
         <p:nvSpPr>
-          <p:cNvPr id="18" name="Rounded Rectangle 17"/>
+          <p:cNvPr id="22" name="Rounded Rectangle 21"/>
           <p:cNvSpPr/>
           <p:nvPr/>
         </p:nvSpPr>
         <p:spPr>
           <a:xfrm>
-            <a:off x="841248" y="4809744"/>
-            <a:ext cx="5715000" cy="530352"/>
+            <a:off x="841248" y="4261104"/>
+            <a:ext cx="5138928" cy="786384"/>
           </a:xfrm>
           <a:prstGeom prst="roundRect">
             <a:avLst>
-              <a:gd name="adj" fmla="val 6000"/>
+              <a:gd name="adj" fmla="val 7000"/>
             </a:avLst>
           </a:prstGeom>
           <a:solidFill>
@@ -9297,9 +9482,55 @@
           </a:p>
         </p:txBody>
       </p:sp>
+      <p:sp>
+        <p:nvSpPr>
+          <p:cNvPr id="23" name="Rounded Rectangle 22"/>
+          <p:cNvSpPr/>
+          <p:nvPr/>
+        </p:nvSpPr>
+        <p:spPr>
+          <a:xfrm>
+            <a:off x="987552" y="4398264"/>
+            <a:ext cx="512064" cy="512064"/>
+          </a:xfrm>
+          <a:prstGeom prst="roundRect">
+            <a:avLst>
+              <a:gd name="adj" fmla="val 26000"/>
+            </a:avLst>
+          </a:prstGeom>
+          <a:solidFill>
+            <a:srgbClr val="EE0000"/>
+          </a:solidFill>
+          <a:ln>
+            <a:noFill/>
+          </a:ln>
+          <a:effectLst/>
+        </p:spPr>
+        <p:style>
+          <a:lnRef idx="1">
+            <a:schemeClr val="accent1"/>
+          </a:lnRef>
+          <a:fillRef idx="3">
+            <a:schemeClr val="accent1"/>
+          </a:fillRef>
+          <a:effectRef idx="2">
+            <a:schemeClr val="accent1"/>
+          </a:effectRef>
+          <a:fontRef idx="minor">
+            <a:schemeClr val="lt1"/>
+          </a:fontRef>
+        </p:style>
+        <p:txBody>
+          <a:bodyPr rtlCol="0" anchor="ctr"/>
+          <a:lstStyle/>
+          <a:p>
+            <a:pPr algn="ctr"/>
+          </a:p>
+        </p:txBody>
+      </p:sp>
       <p:pic>
         <p:nvPicPr>
-          <p:cNvPr id="19" name="Picture 18" descr="check_steel.png"/>
+          <p:cNvPr id="24" name="Picture 23" descr="check_white.png"/>
           <p:cNvPicPr>
             <a:picLocks noChangeAspect="1"/>
           </p:cNvPicPr>
@@ -9313,8 +9544,8 @@
         </p:blipFill>
         <p:spPr>
           <a:xfrm>
-            <a:off x="987552" y="4956048"/>
-            <a:ext cx="237744" cy="237744"/>
+            <a:off x="1110447" y="4521159"/>
+            <a:ext cx="266273" cy="266273"/>
           </a:xfrm>
           <a:prstGeom prst="rect">
             <a:avLst/>
@@ -9323,14 +9554,14 @@
       </p:pic>
       <p:sp>
         <p:nvSpPr>
-          <p:cNvPr id="20" name="TextBox 19"/>
+          <p:cNvPr id="25" name="TextBox 24"/>
           <p:cNvSpPr txBox="1"/>
           <p:nvPr/>
         </p:nvSpPr>
         <p:spPr>
           <a:xfrm>
-            <a:off x="1353312" y="4809744"/>
-            <a:ext cx="5029200" cy="530352"/>
+            <a:off x="1627632" y="4261104"/>
+            <a:ext cx="4206240" cy="786384"/>
           </a:xfrm>
           <a:prstGeom prst="rect">
             <a:avLst/>
@@ -9355,221 +9586,13 @@
               </a:spcAft>
             </a:pPr>
             <a:r>
-              <a:rPr sz="1200" b="0">
+              <a:rPr sz="1150" b="0">
                 <a:solidFill>
                   <a:srgbClr val="1A1A1A"/>
                 </a:solidFill>
                 <a:latin typeface="Red Hat Text"/>
               </a:rPr>
               <a:t>Reach for Knative's when the workload is already a ksvc</a:t>
-            </a:r>
-          </a:p>
-        </p:txBody>
-      </p:sp>
-      <p:sp>
-        <p:nvSpPr>
-          <p:cNvPr id="21" name="Rounded Rectangle 20"/>
-          <p:cNvSpPr/>
-          <p:nvPr/>
-        </p:nvSpPr>
-        <p:spPr>
-          <a:xfrm>
-            <a:off x="6812280" y="2395728"/>
-            <a:ext cx="4538167" cy="2944368"/>
-          </a:xfrm>
-          <a:prstGeom prst="roundRect">
-            <a:avLst>
-              <a:gd name="adj" fmla="val 4000"/>
-            </a:avLst>
-          </a:prstGeom>
-          <a:solidFill>
-            <a:srgbClr val="FFFFFF"/>
-          </a:solidFill>
-          <a:ln w="15240">
-            <a:solidFill>
-              <a:srgbClr val="DDE1E6"/>
-            </a:solidFill>
-          </a:ln>
-          <a:effectLst/>
-        </p:spPr>
-        <p:style>
-          <a:lnRef idx="1">
-            <a:schemeClr val="accent1"/>
-          </a:lnRef>
-          <a:fillRef idx="3">
-            <a:schemeClr val="accent1"/>
-          </a:fillRef>
-          <a:effectRef idx="2">
-            <a:schemeClr val="accent1"/>
-          </a:effectRef>
-          <a:fontRef idx="minor">
-            <a:schemeClr val="lt1"/>
-          </a:fontRef>
-        </p:style>
-        <p:txBody>
-          <a:bodyPr rtlCol="0" anchor="ctr"/>
-          <a:lstStyle/>
-          <a:p>
-            <a:pPr algn="ctr"/>
-          </a:p>
-        </p:txBody>
-      </p:sp>
-      <p:sp>
-        <p:nvSpPr>
-          <p:cNvPr id="22" name="Rounded Rectangle 21"/>
-          <p:cNvSpPr/>
-          <p:nvPr/>
-        </p:nvSpPr>
-        <p:spPr>
-          <a:xfrm>
-            <a:off x="7013448" y="2596896"/>
-            <a:ext cx="1298448" cy="310896"/>
-          </a:xfrm>
-          <a:prstGeom prst="roundRect">
-            <a:avLst>
-              <a:gd name="adj" fmla="val 50000"/>
-            </a:avLst>
-          </a:prstGeom>
-          <a:solidFill>
-            <a:srgbClr val="FCECEC"/>
-          </a:solidFill>
-          <a:ln>
-            <a:noFill/>
-          </a:ln>
-          <a:effectLst/>
-        </p:spPr>
-        <p:style>
-          <a:lnRef idx="1">
-            <a:schemeClr val="accent1"/>
-          </a:lnRef>
-          <a:fillRef idx="3">
-            <a:schemeClr val="accent1"/>
-          </a:fillRef>
-          <a:effectRef idx="2">
-            <a:schemeClr val="accent1"/>
-          </a:effectRef>
-          <a:fontRef idx="minor">
-            <a:schemeClr val="lt1"/>
-          </a:fontRef>
-        </p:style>
-        <p:txBody>
-          <a:bodyPr rtlCol="0" anchor="ctr"/>
-          <a:lstStyle/>
-          <a:p>
-            <a:pPr algn="ctr"/>
-          </a:p>
-        </p:txBody>
-      </p:sp>
-      <p:sp>
-        <p:nvSpPr>
-          <p:cNvPr id="23" name="TextBox 22"/>
-          <p:cNvSpPr txBox="1"/>
-          <p:nvPr/>
-        </p:nvSpPr>
-        <p:spPr>
-          <a:xfrm>
-            <a:off x="7013448" y="2596896"/>
-            <a:ext cx="1298448" cy="310896"/>
-          </a:xfrm>
-          <a:prstGeom prst="rect">
-            <a:avLst/>
-          </a:prstGeom>
-          <a:noFill/>
-        </p:spPr>
-        <p:txBody>
-          <a:bodyPr wrap="none" anchor="ctr" lIns="0" rIns="0" tIns="0" bIns="0">
-            <a:spAutoFit/>
-          </a:bodyPr>
-          <a:lstStyle/>
-          <a:p>
-            <a:pPr algn="ctr">
-              <a:lnSpc>
-                <a:spcPct val="106000"/>
-              </a:lnSpc>
-              <a:spcBef>
-                <a:spcPts val="0"/>
-              </a:spcBef>
-              <a:spcAft>
-                <a:spcPts val="0"/>
-              </a:spcAft>
-            </a:pPr>
-            <a:r>
-              <a:rPr sz="850" b="1">
-                <a:solidFill>
-                  <a:srgbClr val="B80000"/>
-                </a:solidFill>
-                <a:latin typeface="Red Hat Display"/>
-              </a:rPr>
-              <a:t>MEDIA PASS</a:t>
-            </a:r>
-          </a:p>
-        </p:txBody>
-      </p:sp>
-      <p:pic>
-        <p:nvPicPr>
-          <p:cNvPr id="24" name="Picture 23" descr="eye_slate.png"/>
-          <p:cNvPicPr>
-            <a:picLocks noChangeAspect="1"/>
-          </p:cNvPicPr>
-          <p:nvPr/>
-        </p:nvPicPr>
-        <p:blipFill>
-          <a:blip r:embed="rId4"/>
-          <a:stretch>
-            <a:fillRect/>
-          </a:stretch>
-        </p:blipFill>
-        <p:spPr>
-          <a:xfrm>
-            <a:off x="8843619" y="3108960"/>
-            <a:ext cx="475488" cy="475488"/>
-          </a:xfrm>
-          <a:prstGeom prst="rect">
-            <a:avLst/>
-          </a:prstGeom>
-        </p:spPr>
-      </p:pic>
-      <p:sp>
-        <p:nvSpPr>
-          <p:cNvPr id="25" name="TextBox 24"/>
-          <p:cNvSpPr txBox="1"/>
-          <p:nvPr/>
-        </p:nvSpPr>
-        <p:spPr>
-          <a:xfrm>
-            <a:off x="7050024" y="3721608"/>
-            <a:ext cx="4062679" cy="1481328"/>
-          </a:xfrm>
-          <a:prstGeom prst="rect">
-            <a:avLst/>
-          </a:prstGeom>
-          <a:noFill/>
-        </p:spPr>
-        <p:txBody>
-          <a:bodyPr wrap="square" anchor="t" lIns="0" rIns="0" tIns="0" bIns="0">
-            <a:spAutoFit/>
-          </a:bodyPr>
-          <a:lstStyle/>
-          <a:p>
-            <a:pPr algn="l">
-              <a:lnSpc>
-                <a:spcPct val="120000"/>
-              </a:lnSpc>
-              <a:spcBef>
-                <a:spcPts val="0"/>
-              </a:spcBef>
-              <a:spcAft>
-                <a:spcPts val="0"/>
-              </a:spcAft>
-            </a:pPr>
-            <a:r>
-              <a:rPr sz="950" b="0">
-                <a:solidFill>
-                  <a:srgbClr val="8A9099"/>
-                </a:solidFill>
-                <a:latin typeface="Red Hat Text"/>
-              </a:rPr>
-              <a:t>The ksvc Route fanning to a fat 80% arrow (v1 #stable) and a thin 20% arrow (v2 #candidate), each tag with its own sub-route chip; a small "rollback: stable=100 (one line)" callout; a footnote comparing GitOps at Scale Rollouts / Service Mesh mesh / here.</a:t>
             </a:r>
           </a:p>
         </p:txBody>
@@ -9922,11 +9945,11 @@
         <p:spPr>
           <a:xfrm>
             <a:off x="841248" y="2670048"/>
-            <a:ext cx="5715000" cy="530352"/>
+            <a:ext cx="5138928" cy="786384"/>
           </a:xfrm>
           <a:prstGeom prst="roundRect">
             <a:avLst>
-              <a:gd name="adj" fmla="val 6000"/>
+              <a:gd name="adj" fmla="val 7000"/>
             </a:avLst>
           </a:prstGeom>
           <a:solidFill>
@@ -9961,9 +9984,55 @@
           </a:p>
         </p:txBody>
       </p:sp>
+      <p:sp>
+        <p:nvSpPr>
+          <p:cNvPr id="8" name="Rounded Rectangle 7"/>
+          <p:cNvSpPr/>
+          <p:nvPr/>
+        </p:nvSpPr>
+        <p:spPr>
+          <a:xfrm>
+            <a:off x="987552" y="2807208"/>
+            <a:ext cx="512064" cy="512064"/>
+          </a:xfrm>
+          <a:prstGeom prst="roundRect">
+            <a:avLst>
+              <a:gd name="adj" fmla="val 26000"/>
+            </a:avLst>
+          </a:prstGeom>
+          <a:solidFill>
+            <a:srgbClr val="EE0000"/>
+          </a:solidFill>
+          <a:ln>
+            <a:noFill/>
+          </a:ln>
+          <a:effectLst/>
+        </p:spPr>
+        <p:style>
+          <a:lnRef idx="1">
+            <a:schemeClr val="accent1"/>
+          </a:lnRef>
+          <a:fillRef idx="3">
+            <a:schemeClr val="accent1"/>
+          </a:fillRef>
+          <a:effectRef idx="2">
+            <a:schemeClr val="accent1"/>
+          </a:effectRef>
+          <a:fontRef idx="minor">
+            <a:schemeClr val="lt1"/>
+          </a:fontRef>
+        </p:style>
+        <p:txBody>
+          <a:bodyPr rtlCol="0" anchor="ctr"/>
+          <a:lstStyle/>
+          <a:p>
+            <a:pPr algn="ctr"/>
+          </a:p>
+        </p:txBody>
+      </p:sp>
       <p:pic>
         <p:nvPicPr>
-          <p:cNvPr id="8" name="Picture 7" descr="check_steel.png"/>
+          <p:cNvPr id="9" name="Picture 8" descr="check_white.png"/>
           <p:cNvPicPr>
             <a:picLocks noChangeAspect="1"/>
           </p:cNvPicPr>
@@ -9977,8 +10046,8 @@
         </p:blipFill>
         <p:spPr>
           <a:xfrm>
-            <a:off x="987552" y="2816352"/>
-            <a:ext cx="237744" cy="237744"/>
+            <a:off x="1110447" y="2930103"/>
+            <a:ext cx="266273" cy="266273"/>
           </a:xfrm>
           <a:prstGeom prst="rect">
             <a:avLst/>
@@ -9987,14 +10056,14 @@
       </p:pic>
       <p:sp>
         <p:nvSpPr>
-          <p:cNvPr id="9" name="TextBox 8"/>
+          <p:cNvPr id="10" name="TextBox 9"/>
           <p:cNvSpPr txBox="1"/>
           <p:nvPr/>
         </p:nvSpPr>
         <p:spPr>
           <a:xfrm>
-            <a:off x="1353312" y="2670048"/>
-            <a:ext cx="5029200" cy="530352"/>
+            <a:off x="1627632" y="2670048"/>
+            <a:ext cx="4206240" cy="786384"/>
           </a:xfrm>
           <a:prstGeom prst="rect">
             <a:avLst/>
@@ -10019,7 +10088,7 @@
               </a:spcAft>
             </a:pPr>
             <a:r>
-              <a:rPr sz="1200" b="0">
+              <a:rPr sz="1150" b="0">
                 <a:solidFill>
                   <a:srgbClr val="1A1A1A"/>
                 </a:solidFill>
@@ -10032,18 +10101,18 @@
       </p:sp>
       <p:sp>
         <p:nvSpPr>
-          <p:cNvPr id="10" name="Rounded Rectangle 9"/>
+          <p:cNvPr id="11" name="Rounded Rectangle 10"/>
           <p:cNvSpPr/>
           <p:nvPr/>
         </p:nvSpPr>
         <p:spPr>
           <a:xfrm>
-            <a:off x="841248" y="3273552"/>
-            <a:ext cx="5715000" cy="530352"/>
+            <a:off x="6254496" y="2670048"/>
+            <a:ext cx="5138928" cy="786384"/>
           </a:xfrm>
           <a:prstGeom prst="roundRect">
             <a:avLst>
-              <a:gd name="adj" fmla="val 6000"/>
+              <a:gd name="adj" fmla="val 7000"/>
             </a:avLst>
           </a:prstGeom>
           <a:solidFill>
@@ -10078,9 +10147,55 @@
           </a:p>
         </p:txBody>
       </p:sp>
+      <p:sp>
+        <p:nvSpPr>
+          <p:cNvPr id="12" name="Rounded Rectangle 11"/>
+          <p:cNvSpPr/>
+          <p:nvPr/>
+        </p:nvSpPr>
+        <p:spPr>
+          <a:xfrm>
+            <a:off x="6400800" y="2807208"/>
+            <a:ext cx="512064" cy="512064"/>
+          </a:xfrm>
+          <a:prstGeom prst="roundRect">
+            <a:avLst>
+              <a:gd name="adj" fmla="val 26000"/>
+            </a:avLst>
+          </a:prstGeom>
+          <a:solidFill>
+            <a:srgbClr val="EE0000"/>
+          </a:solidFill>
+          <a:ln>
+            <a:noFill/>
+          </a:ln>
+          <a:effectLst/>
+        </p:spPr>
+        <p:style>
+          <a:lnRef idx="1">
+            <a:schemeClr val="accent1"/>
+          </a:lnRef>
+          <a:fillRef idx="3">
+            <a:schemeClr val="accent1"/>
+          </a:fillRef>
+          <a:effectRef idx="2">
+            <a:schemeClr val="accent1"/>
+          </a:effectRef>
+          <a:fontRef idx="minor">
+            <a:schemeClr val="lt1"/>
+          </a:fontRef>
+        </p:style>
+        <p:txBody>
+          <a:bodyPr rtlCol="0" anchor="ctr"/>
+          <a:lstStyle/>
+          <a:p>
+            <a:pPr algn="ctr"/>
+          </a:p>
+        </p:txBody>
+      </p:sp>
       <p:pic>
         <p:nvPicPr>
-          <p:cNvPr id="11" name="Picture 10" descr="check_steel.png"/>
+          <p:cNvPr id="13" name="Picture 12" descr="check_white.png"/>
           <p:cNvPicPr>
             <a:picLocks noChangeAspect="1"/>
           </p:cNvPicPr>
@@ -10094,8 +10209,8 @@
         </p:blipFill>
         <p:spPr>
           <a:xfrm>
-            <a:off x="987552" y="3419856"/>
-            <a:ext cx="237744" cy="237744"/>
+            <a:off x="6523695" y="2930103"/>
+            <a:ext cx="266273" cy="266273"/>
           </a:xfrm>
           <a:prstGeom prst="rect">
             <a:avLst/>
@@ -10104,14 +10219,14 @@
       </p:pic>
       <p:sp>
         <p:nvSpPr>
-          <p:cNvPr id="12" name="TextBox 11"/>
+          <p:cNvPr id="14" name="TextBox 13"/>
           <p:cNvSpPr txBox="1"/>
           <p:nvPr/>
         </p:nvSpPr>
         <p:spPr>
           <a:xfrm>
-            <a:off x="1353312" y="3273552"/>
-            <a:ext cx="5029200" cy="530352"/>
+            <a:off x="7040880" y="2670048"/>
+            <a:ext cx="4206240" cy="786384"/>
           </a:xfrm>
           <a:prstGeom prst="rect">
             <a:avLst/>
@@ -10136,7 +10251,7 @@
               </a:spcAft>
             </a:pPr>
             <a:r>
-              <a:rPr sz="1200" b="0">
+              <a:rPr sz="1150" b="0">
                 <a:solidFill>
                   <a:srgbClr val="1A1A1A"/>
                 </a:solidFill>
@@ -10149,18 +10264,18 @@
       </p:sp>
       <p:sp>
         <p:nvSpPr>
-          <p:cNvPr id="13" name="Rounded Rectangle 12"/>
+          <p:cNvPr id="15" name="Rounded Rectangle 14"/>
           <p:cNvSpPr/>
           <p:nvPr/>
         </p:nvSpPr>
         <p:spPr>
           <a:xfrm>
-            <a:off x="841248" y="3877056"/>
-            <a:ext cx="5715000" cy="530352"/>
+            <a:off x="841248" y="3602736"/>
+            <a:ext cx="5138928" cy="786384"/>
           </a:xfrm>
           <a:prstGeom prst="roundRect">
             <a:avLst>
-              <a:gd name="adj" fmla="val 6000"/>
+              <a:gd name="adj" fmla="val 7000"/>
             </a:avLst>
           </a:prstGeom>
           <a:solidFill>
@@ -10195,9 +10310,55 @@
           </a:p>
         </p:txBody>
       </p:sp>
+      <p:sp>
+        <p:nvSpPr>
+          <p:cNvPr id="16" name="Rounded Rectangle 15"/>
+          <p:cNvSpPr/>
+          <p:nvPr/>
+        </p:nvSpPr>
+        <p:spPr>
+          <a:xfrm>
+            <a:off x="987552" y="3739896"/>
+            <a:ext cx="512064" cy="512064"/>
+          </a:xfrm>
+          <a:prstGeom prst="roundRect">
+            <a:avLst>
+              <a:gd name="adj" fmla="val 26000"/>
+            </a:avLst>
+          </a:prstGeom>
+          <a:solidFill>
+            <a:srgbClr val="EE0000"/>
+          </a:solidFill>
+          <a:ln>
+            <a:noFill/>
+          </a:ln>
+          <a:effectLst/>
+        </p:spPr>
+        <p:style>
+          <a:lnRef idx="1">
+            <a:schemeClr val="accent1"/>
+          </a:lnRef>
+          <a:fillRef idx="3">
+            <a:schemeClr val="accent1"/>
+          </a:fillRef>
+          <a:effectRef idx="2">
+            <a:schemeClr val="accent1"/>
+          </a:effectRef>
+          <a:fontRef idx="minor">
+            <a:schemeClr val="lt1"/>
+          </a:fontRef>
+        </p:style>
+        <p:txBody>
+          <a:bodyPr rtlCol="0" anchor="ctr"/>
+          <a:lstStyle/>
+          <a:p>
+            <a:pPr algn="ctr"/>
+          </a:p>
+        </p:txBody>
+      </p:sp>
       <p:pic>
         <p:nvPicPr>
-          <p:cNvPr id="14" name="Picture 13" descr="check_steel.png"/>
+          <p:cNvPr id="17" name="Picture 16" descr="check_white.png"/>
           <p:cNvPicPr>
             <a:picLocks noChangeAspect="1"/>
           </p:cNvPicPr>
@@ -10211,8 +10372,8 @@
         </p:blipFill>
         <p:spPr>
           <a:xfrm>
-            <a:off x="987552" y="4023360"/>
-            <a:ext cx="237744" cy="237744"/>
+            <a:off x="1110447" y="3862791"/>
+            <a:ext cx="266273" cy="266273"/>
           </a:xfrm>
           <a:prstGeom prst="rect">
             <a:avLst/>
@@ -10221,14 +10382,14 @@
       </p:pic>
       <p:sp>
         <p:nvSpPr>
-          <p:cNvPr id="15" name="TextBox 14"/>
+          <p:cNvPr id="18" name="TextBox 17"/>
           <p:cNvSpPr txBox="1"/>
           <p:nvPr/>
         </p:nvSpPr>
         <p:spPr>
           <a:xfrm>
-            <a:off x="1353312" y="3877056"/>
-            <a:ext cx="5029200" cy="530352"/>
+            <a:off x="1627632" y="3602736"/>
+            <a:ext cx="4206240" cy="786384"/>
           </a:xfrm>
           <a:prstGeom prst="rect">
             <a:avLst/>
@@ -10253,7 +10414,7 @@
               </a:spcAft>
             </a:pPr>
             <a:r>
-              <a:rPr sz="1200" b="0">
+              <a:rPr sz="1150" b="0">
                 <a:solidFill>
                   <a:srgbClr val="1A1A1A"/>
                 </a:solidFill>
@@ -10266,18 +10427,18 @@
       </p:sp>
       <p:sp>
         <p:nvSpPr>
-          <p:cNvPr id="16" name="Rounded Rectangle 15"/>
+          <p:cNvPr id="19" name="Rounded Rectangle 18"/>
           <p:cNvSpPr/>
           <p:nvPr/>
         </p:nvSpPr>
         <p:spPr>
           <a:xfrm>
-            <a:off x="841248" y="4480560"/>
-            <a:ext cx="5715000" cy="530352"/>
+            <a:off x="6254496" y="3602736"/>
+            <a:ext cx="5138928" cy="786384"/>
           </a:xfrm>
           <a:prstGeom prst="roundRect">
             <a:avLst>
-              <a:gd name="adj" fmla="val 6000"/>
+              <a:gd name="adj" fmla="val 7000"/>
             </a:avLst>
           </a:prstGeom>
           <a:solidFill>
@@ -10312,9 +10473,55 @@
           </a:p>
         </p:txBody>
       </p:sp>
+      <p:sp>
+        <p:nvSpPr>
+          <p:cNvPr id="20" name="Rounded Rectangle 19"/>
+          <p:cNvSpPr/>
+          <p:nvPr/>
+        </p:nvSpPr>
+        <p:spPr>
+          <a:xfrm>
+            <a:off x="6400800" y="3739896"/>
+            <a:ext cx="512064" cy="512064"/>
+          </a:xfrm>
+          <a:prstGeom prst="roundRect">
+            <a:avLst>
+              <a:gd name="adj" fmla="val 26000"/>
+            </a:avLst>
+          </a:prstGeom>
+          <a:solidFill>
+            <a:srgbClr val="EE0000"/>
+          </a:solidFill>
+          <a:ln>
+            <a:noFill/>
+          </a:ln>
+          <a:effectLst/>
+        </p:spPr>
+        <p:style>
+          <a:lnRef idx="1">
+            <a:schemeClr val="accent1"/>
+          </a:lnRef>
+          <a:fillRef idx="3">
+            <a:schemeClr val="accent1"/>
+          </a:fillRef>
+          <a:effectRef idx="2">
+            <a:schemeClr val="accent1"/>
+          </a:effectRef>
+          <a:fontRef idx="minor">
+            <a:schemeClr val="lt1"/>
+          </a:fontRef>
+        </p:style>
+        <p:txBody>
+          <a:bodyPr rtlCol="0" anchor="ctr"/>
+          <a:lstStyle/>
+          <a:p>
+            <a:pPr algn="ctr"/>
+          </a:p>
+        </p:txBody>
+      </p:sp>
       <p:pic>
         <p:nvPicPr>
-          <p:cNvPr id="17" name="Picture 16" descr="check_steel.png"/>
+          <p:cNvPr id="21" name="Picture 20" descr="check_white.png"/>
           <p:cNvPicPr>
             <a:picLocks noChangeAspect="1"/>
           </p:cNvPicPr>
@@ -10328,8 +10535,8 @@
         </p:blipFill>
         <p:spPr>
           <a:xfrm>
-            <a:off x="987552" y="4626864"/>
-            <a:ext cx="237744" cy="237744"/>
+            <a:off x="6523695" y="3862791"/>
+            <a:ext cx="266273" cy="266273"/>
           </a:xfrm>
           <a:prstGeom prst="rect">
             <a:avLst/>
@@ -10338,14 +10545,14 @@
       </p:pic>
       <p:sp>
         <p:nvSpPr>
-          <p:cNvPr id="18" name="TextBox 17"/>
+          <p:cNvPr id="22" name="TextBox 21"/>
           <p:cNvSpPr txBox="1"/>
           <p:nvPr/>
         </p:nvSpPr>
         <p:spPr>
           <a:xfrm>
-            <a:off x="1353312" y="4480560"/>
-            <a:ext cx="5029200" cy="530352"/>
+            <a:off x="7040880" y="3602736"/>
+            <a:ext cx="4206240" cy="786384"/>
           </a:xfrm>
           <a:prstGeom prst="rect">
             <a:avLst/>
@@ -10370,7 +10577,7 @@
               </a:spcAft>
             </a:pPr>
             <a:r>
-              <a:rPr sz="1200" b="0">
+              <a:rPr sz="1150" b="0">
                 <a:solidFill>
                   <a:srgbClr val="1A1A1A"/>
                 </a:solidFill>
@@ -10383,18 +10590,18 @@
       </p:sp>
       <p:sp>
         <p:nvSpPr>
-          <p:cNvPr id="19" name="Rounded Rectangle 18"/>
+          <p:cNvPr id="23" name="Rounded Rectangle 22"/>
           <p:cNvSpPr/>
           <p:nvPr/>
         </p:nvSpPr>
         <p:spPr>
           <a:xfrm>
-            <a:off x="841248" y="5084064"/>
-            <a:ext cx="5715000" cy="530352"/>
+            <a:off x="841248" y="4535424"/>
+            <a:ext cx="5138928" cy="786384"/>
           </a:xfrm>
           <a:prstGeom prst="roundRect">
             <a:avLst>
-              <a:gd name="adj" fmla="val 6000"/>
+              <a:gd name="adj" fmla="val 7000"/>
             </a:avLst>
           </a:prstGeom>
           <a:solidFill>
@@ -10429,9 +10636,55 @@
           </a:p>
         </p:txBody>
       </p:sp>
+      <p:sp>
+        <p:nvSpPr>
+          <p:cNvPr id="24" name="Rounded Rectangle 23"/>
+          <p:cNvSpPr/>
+          <p:nvPr/>
+        </p:nvSpPr>
+        <p:spPr>
+          <a:xfrm>
+            <a:off x="987552" y="4672584"/>
+            <a:ext cx="512064" cy="512064"/>
+          </a:xfrm>
+          <a:prstGeom prst="roundRect">
+            <a:avLst>
+              <a:gd name="adj" fmla="val 26000"/>
+            </a:avLst>
+          </a:prstGeom>
+          <a:solidFill>
+            <a:srgbClr val="EE0000"/>
+          </a:solidFill>
+          <a:ln>
+            <a:noFill/>
+          </a:ln>
+          <a:effectLst/>
+        </p:spPr>
+        <p:style>
+          <a:lnRef idx="1">
+            <a:schemeClr val="accent1"/>
+          </a:lnRef>
+          <a:fillRef idx="3">
+            <a:schemeClr val="accent1"/>
+          </a:fillRef>
+          <a:effectRef idx="2">
+            <a:schemeClr val="accent1"/>
+          </a:effectRef>
+          <a:fontRef idx="minor">
+            <a:schemeClr val="lt1"/>
+          </a:fontRef>
+        </p:style>
+        <p:txBody>
+          <a:bodyPr rtlCol="0" anchor="ctr"/>
+          <a:lstStyle/>
+          <a:p>
+            <a:pPr algn="ctr"/>
+          </a:p>
+        </p:txBody>
+      </p:sp>
       <p:pic>
         <p:nvPicPr>
-          <p:cNvPr id="20" name="Picture 19" descr="check_steel.png"/>
+          <p:cNvPr id="25" name="Picture 24" descr="check_white.png"/>
           <p:cNvPicPr>
             <a:picLocks noChangeAspect="1"/>
           </p:cNvPicPr>
@@ -10445,8 +10698,8 @@
         </p:blipFill>
         <p:spPr>
           <a:xfrm>
-            <a:off x="987552" y="5230368"/>
-            <a:ext cx="237744" cy="237744"/>
+            <a:off x="1110447" y="4795479"/>
+            <a:ext cx="266273" cy="266273"/>
           </a:xfrm>
           <a:prstGeom prst="rect">
             <a:avLst/>
@@ -10455,14 +10708,14 @@
       </p:pic>
       <p:sp>
         <p:nvSpPr>
-          <p:cNvPr id="21" name="TextBox 20"/>
+          <p:cNvPr id="26" name="TextBox 25"/>
           <p:cNvSpPr txBox="1"/>
           <p:nvPr/>
         </p:nvSpPr>
         <p:spPr>
           <a:xfrm>
-            <a:off x="1353312" y="5084064"/>
-            <a:ext cx="5029200" cy="530352"/>
+            <a:off x="1627632" y="4535424"/>
+            <a:ext cx="4206240" cy="786384"/>
           </a:xfrm>
           <a:prstGeom prst="rect">
             <a:avLst/>
@@ -10487,221 +10740,13 @@
               </a:spcAft>
             </a:pPr>
             <a:r>
-              <a:rPr sz="1200" b="0">
+              <a:rPr sz="1150" b="0">
                 <a:solidFill>
                   <a:srgbClr val="1A1A1A"/>
                 </a:solidFill>
                 <a:latin typeface="Red Hat Text"/>
               </a:rPr>
               <a:t>Wiring + scale-up are REAL; processing the event is Eventing</a:t>
-            </a:r>
-          </a:p>
-        </p:txBody>
-      </p:sp>
-      <p:sp>
-        <p:nvSpPr>
-          <p:cNvPr id="22" name="Rounded Rectangle 21"/>
-          <p:cNvSpPr/>
-          <p:nvPr/>
-        </p:nvSpPr>
-        <p:spPr>
-          <a:xfrm>
-            <a:off x="6812280" y="2670048"/>
-            <a:ext cx="4538167" cy="2944368"/>
-          </a:xfrm>
-          <a:prstGeom prst="roundRect">
-            <a:avLst>
-              <a:gd name="adj" fmla="val 4000"/>
-            </a:avLst>
-          </a:prstGeom>
-          <a:solidFill>
-            <a:srgbClr val="FFFFFF"/>
-          </a:solidFill>
-          <a:ln w="15240">
-            <a:solidFill>
-              <a:srgbClr val="DDE1E6"/>
-            </a:solidFill>
-          </a:ln>
-          <a:effectLst/>
-        </p:spPr>
-        <p:style>
-          <a:lnRef idx="1">
-            <a:schemeClr val="accent1"/>
-          </a:lnRef>
-          <a:fillRef idx="3">
-            <a:schemeClr val="accent1"/>
-          </a:fillRef>
-          <a:effectRef idx="2">
-            <a:schemeClr val="accent1"/>
-          </a:effectRef>
-          <a:fontRef idx="minor">
-            <a:schemeClr val="lt1"/>
-          </a:fontRef>
-        </p:style>
-        <p:txBody>
-          <a:bodyPr rtlCol="0" anchor="ctr"/>
-          <a:lstStyle/>
-          <a:p>
-            <a:pPr algn="ctr"/>
-          </a:p>
-        </p:txBody>
-      </p:sp>
-      <p:sp>
-        <p:nvSpPr>
-          <p:cNvPr id="23" name="Rounded Rectangle 22"/>
-          <p:cNvSpPr/>
-          <p:nvPr/>
-        </p:nvSpPr>
-        <p:spPr>
-          <a:xfrm>
-            <a:off x="7013448" y="2871216"/>
-            <a:ext cx="1298448" cy="310896"/>
-          </a:xfrm>
-          <a:prstGeom prst="roundRect">
-            <a:avLst>
-              <a:gd name="adj" fmla="val 50000"/>
-            </a:avLst>
-          </a:prstGeom>
-          <a:solidFill>
-            <a:srgbClr val="FCECEC"/>
-          </a:solidFill>
-          <a:ln>
-            <a:noFill/>
-          </a:ln>
-          <a:effectLst/>
-        </p:spPr>
-        <p:style>
-          <a:lnRef idx="1">
-            <a:schemeClr val="accent1"/>
-          </a:lnRef>
-          <a:fillRef idx="3">
-            <a:schemeClr val="accent1"/>
-          </a:fillRef>
-          <a:effectRef idx="2">
-            <a:schemeClr val="accent1"/>
-          </a:effectRef>
-          <a:fontRef idx="minor">
-            <a:schemeClr val="lt1"/>
-          </a:fontRef>
-        </p:style>
-        <p:txBody>
-          <a:bodyPr rtlCol="0" anchor="ctr"/>
-          <a:lstStyle/>
-          <a:p>
-            <a:pPr algn="ctr"/>
-          </a:p>
-        </p:txBody>
-      </p:sp>
-      <p:sp>
-        <p:nvSpPr>
-          <p:cNvPr id="24" name="TextBox 23"/>
-          <p:cNvSpPr txBox="1"/>
-          <p:nvPr/>
-        </p:nvSpPr>
-        <p:spPr>
-          <a:xfrm>
-            <a:off x="7013448" y="2871216"/>
-            <a:ext cx="1298448" cy="310896"/>
-          </a:xfrm>
-          <a:prstGeom prst="rect">
-            <a:avLst/>
-          </a:prstGeom>
-          <a:noFill/>
-        </p:spPr>
-        <p:txBody>
-          <a:bodyPr wrap="none" anchor="ctr" lIns="0" rIns="0" tIns="0" bIns="0">
-            <a:spAutoFit/>
-          </a:bodyPr>
-          <a:lstStyle/>
-          <a:p>
-            <a:pPr algn="ctr">
-              <a:lnSpc>
-                <a:spcPct val="106000"/>
-              </a:lnSpc>
-              <a:spcBef>
-                <a:spcPts val="0"/>
-              </a:spcBef>
-              <a:spcAft>
-                <a:spcPts val="0"/>
-              </a:spcAft>
-            </a:pPr>
-            <a:r>
-              <a:rPr sz="850" b="1">
-                <a:solidFill>
-                  <a:srgbClr val="B80000"/>
-                </a:solidFill>
-                <a:latin typeface="Red Hat Display"/>
-              </a:rPr>
-              <a:t>MEDIA PASS</a:t>
-            </a:r>
-          </a:p>
-        </p:txBody>
-      </p:sp>
-      <p:pic>
-        <p:nvPicPr>
-          <p:cNvPr id="25" name="Picture 24" descr="eye_slate.png"/>
-          <p:cNvPicPr>
-            <a:picLocks noChangeAspect="1"/>
-          </p:cNvPicPr>
-          <p:nvPr/>
-        </p:nvPicPr>
-        <p:blipFill>
-          <a:blip r:embed="rId4"/>
-          <a:stretch>
-            <a:fillRect/>
-          </a:stretch>
-        </p:blipFill>
-        <p:spPr>
-          <a:xfrm>
-            <a:off x="8843619" y="3383280"/>
-            <a:ext cx="475488" cy="475488"/>
-          </a:xfrm>
-          <a:prstGeom prst="rect">
-            <a:avLst/>
-          </a:prstGeom>
-        </p:spPr>
-      </p:pic>
-      <p:sp>
-        <p:nvSpPr>
-          <p:cNvPr id="26" name="TextBox 25"/>
-          <p:cNvSpPr txBox="1"/>
-          <p:nvPr/>
-        </p:nvSpPr>
-        <p:spPr>
-          <a:xfrm>
-            <a:off x="7050024" y="3995928"/>
-            <a:ext cx="4062679" cy="1481328"/>
-          </a:xfrm>
-          <a:prstGeom prst="rect">
-            <a:avLst/>
-          </a:prstGeom>
-          <a:noFill/>
-        </p:spPr>
-        <p:txBody>
-          <a:bodyPr wrap="square" anchor="t" lIns="0" rIns="0" tIns="0" bIns="0">
-            <a:spAutoFit/>
-          </a:bodyPr>
-          <a:lstStyle/>
-          <a:p>
-            <a:pPr algn="l">
-              <a:lnSpc>
-                <a:spcPct val="120000"/>
-              </a:lnSpc>
-              <a:spcBef>
-                <a:spcPts val="0"/>
-              </a:spcBef>
-              <a:spcAft>
-                <a:spcPts val="0"/>
-              </a:spcAft>
-            </a:pPr>
-            <a:r>
-              <a:rPr sz="950" b="0">
-                <a:solidFill>
-                  <a:srgbClr val="8A9099"/>
-                </a:solidFill>
-                <a:latin typeface="Red Hat Text"/>
-              </a:rPr>
-              <a:t>PingSource → Broker (in-memory) → Trigger → ksvc, with a lightning bolt on the ksvc "wakes from zero" and a callout on the delivery edge "HTTP 404 — no handler yet → Eventing"; the whole panel tinted as a "taste" with a forward-pointer to the eventing module.</a:t>
             </a:r>
           </a:p>
         </p:txBody>
@@ -11054,11 +11099,11 @@
         <p:spPr>
           <a:xfrm>
             <a:off x="841248" y="2670048"/>
-            <a:ext cx="5715000" cy="530352"/>
+            <a:ext cx="5138928" cy="786384"/>
           </a:xfrm>
           <a:prstGeom prst="roundRect">
             <a:avLst>
-              <a:gd name="adj" fmla="val 6000"/>
+              <a:gd name="adj" fmla="val 7000"/>
             </a:avLst>
           </a:prstGeom>
           <a:solidFill>
@@ -11093,9 +11138,55 @@
           </a:p>
         </p:txBody>
       </p:sp>
+      <p:sp>
+        <p:nvSpPr>
+          <p:cNvPr id="8" name="Rounded Rectangle 7"/>
+          <p:cNvSpPr/>
+          <p:nvPr/>
+        </p:nvSpPr>
+        <p:spPr>
+          <a:xfrm>
+            <a:off x="987552" y="2807208"/>
+            <a:ext cx="512064" cy="512064"/>
+          </a:xfrm>
+          <a:prstGeom prst="roundRect">
+            <a:avLst>
+              <a:gd name="adj" fmla="val 26000"/>
+            </a:avLst>
+          </a:prstGeom>
+          <a:solidFill>
+            <a:srgbClr val="EE0000"/>
+          </a:solidFill>
+          <a:ln>
+            <a:noFill/>
+          </a:ln>
+          <a:effectLst/>
+        </p:spPr>
+        <p:style>
+          <a:lnRef idx="1">
+            <a:schemeClr val="accent1"/>
+          </a:lnRef>
+          <a:fillRef idx="3">
+            <a:schemeClr val="accent1"/>
+          </a:fillRef>
+          <a:effectRef idx="2">
+            <a:schemeClr val="accent1"/>
+          </a:effectRef>
+          <a:fontRef idx="minor">
+            <a:schemeClr val="lt1"/>
+          </a:fontRef>
+        </p:style>
+        <p:txBody>
+          <a:bodyPr rtlCol="0" anchor="ctr"/>
+          <a:lstStyle/>
+          <a:p>
+            <a:pPr algn="ctr"/>
+          </a:p>
+        </p:txBody>
+      </p:sp>
       <p:pic>
         <p:nvPicPr>
-          <p:cNvPr id="8" name="Picture 7" descr="check_steel.png"/>
+          <p:cNvPr id="9" name="Picture 8" descr="check_white.png"/>
           <p:cNvPicPr>
             <a:picLocks noChangeAspect="1"/>
           </p:cNvPicPr>
@@ -11109,8 +11200,8 @@
         </p:blipFill>
         <p:spPr>
           <a:xfrm>
-            <a:off x="987552" y="2816352"/>
-            <a:ext cx="237744" cy="237744"/>
+            <a:off x="1110447" y="2930103"/>
+            <a:ext cx="266273" cy="266273"/>
           </a:xfrm>
           <a:prstGeom prst="rect">
             <a:avLst/>
@@ -11119,14 +11210,14 @@
       </p:pic>
       <p:sp>
         <p:nvSpPr>
-          <p:cNvPr id="9" name="TextBox 8"/>
+          <p:cNvPr id="10" name="TextBox 9"/>
           <p:cNvSpPr txBox="1"/>
           <p:nvPr/>
         </p:nvSpPr>
         <p:spPr>
           <a:xfrm>
-            <a:off x="1353312" y="2670048"/>
-            <a:ext cx="5029200" cy="530352"/>
+            <a:off x="1627632" y="2670048"/>
+            <a:ext cx="4206240" cy="786384"/>
           </a:xfrm>
           <a:prstGeom prst="rect">
             <a:avLst/>
@@ -11151,7 +11242,7 @@
               </a:spcAft>
             </a:pPr>
             <a:r>
-              <a:rPr sz="1200" b="0">
+              <a:rPr sz="1150" b="0">
                 <a:solidFill>
                   <a:srgbClr val="1A1A1A"/>
                 </a:solidFill>
@@ -11164,18 +11255,18 @@
       </p:sp>
       <p:sp>
         <p:nvSpPr>
-          <p:cNvPr id="10" name="Rounded Rectangle 9"/>
+          <p:cNvPr id="11" name="Rounded Rectangle 10"/>
           <p:cNvSpPr/>
           <p:nvPr/>
         </p:nvSpPr>
         <p:spPr>
           <a:xfrm>
-            <a:off x="841248" y="3273552"/>
-            <a:ext cx="5715000" cy="530352"/>
+            <a:off x="6254496" y="2670048"/>
+            <a:ext cx="5138928" cy="786384"/>
           </a:xfrm>
           <a:prstGeom prst="roundRect">
             <a:avLst>
-              <a:gd name="adj" fmla="val 6000"/>
+              <a:gd name="adj" fmla="val 7000"/>
             </a:avLst>
           </a:prstGeom>
           <a:solidFill>
@@ -11210,9 +11301,55 @@
           </a:p>
         </p:txBody>
       </p:sp>
+      <p:sp>
+        <p:nvSpPr>
+          <p:cNvPr id="12" name="Rounded Rectangle 11"/>
+          <p:cNvSpPr/>
+          <p:nvPr/>
+        </p:nvSpPr>
+        <p:spPr>
+          <a:xfrm>
+            <a:off x="6400800" y="2807208"/>
+            <a:ext cx="512064" cy="512064"/>
+          </a:xfrm>
+          <a:prstGeom prst="roundRect">
+            <a:avLst>
+              <a:gd name="adj" fmla="val 26000"/>
+            </a:avLst>
+          </a:prstGeom>
+          <a:solidFill>
+            <a:srgbClr val="EE0000"/>
+          </a:solidFill>
+          <a:ln>
+            <a:noFill/>
+          </a:ln>
+          <a:effectLst/>
+        </p:spPr>
+        <p:style>
+          <a:lnRef idx="1">
+            <a:schemeClr val="accent1"/>
+          </a:lnRef>
+          <a:fillRef idx="3">
+            <a:schemeClr val="accent1"/>
+          </a:fillRef>
+          <a:effectRef idx="2">
+            <a:schemeClr val="accent1"/>
+          </a:effectRef>
+          <a:fontRef idx="minor">
+            <a:schemeClr val="lt1"/>
+          </a:fontRef>
+        </p:style>
+        <p:txBody>
+          <a:bodyPr rtlCol="0" anchor="ctr"/>
+          <a:lstStyle/>
+          <a:p>
+            <a:pPr algn="ctr"/>
+          </a:p>
+        </p:txBody>
+      </p:sp>
       <p:pic>
         <p:nvPicPr>
-          <p:cNvPr id="11" name="Picture 10" descr="check_steel.png"/>
+          <p:cNvPr id="13" name="Picture 12" descr="check_white.png"/>
           <p:cNvPicPr>
             <a:picLocks noChangeAspect="1"/>
           </p:cNvPicPr>
@@ -11226,8 +11363,8 @@
         </p:blipFill>
         <p:spPr>
           <a:xfrm>
-            <a:off x="987552" y="3419856"/>
-            <a:ext cx="237744" cy="237744"/>
+            <a:off x="6523695" y="2930103"/>
+            <a:ext cx="266273" cy="266273"/>
           </a:xfrm>
           <a:prstGeom prst="rect">
             <a:avLst/>
@@ -11236,14 +11373,14 @@
       </p:pic>
       <p:sp>
         <p:nvSpPr>
-          <p:cNvPr id="12" name="TextBox 11"/>
+          <p:cNvPr id="14" name="TextBox 13"/>
           <p:cNvSpPr txBox="1"/>
           <p:nvPr/>
         </p:nvSpPr>
         <p:spPr>
           <a:xfrm>
-            <a:off x="1353312" y="3273552"/>
-            <a:ext cx="5029200" cy="530352"/>
+            <a:off x="7040880" y="2670048"/>
+            <a:ext cx="4206240" cy="786384"/>
           </a:xfrm>
           <a:prstGeom prst="rect">
             <a:avLst/>
@@ -11268,7 +11405,7 @@
               </a:spcAft>
             </a:pPr>
             <a:r>
-              <a:rPr sz="1200" b="0">
+              <a:rPr sz="1150" b="0">
                 <a:solidFill>
                   <a:srgbClr val="1A1A1A"/>
                 </a:solidFill>
@@ -11281,18 +11418,18 @@
       </p:sp>
       <p:sp>
         <p:nvSpPr>
-          <p:cNvPr id="13" name="Rounded Rectangle 12"/>
+          <p:cNvPr id="15" name="Rounded Rectangle 14"/>
           <p:cNvSpPr/>
           <p:nvPr/>
         </p:nvSpPr>
         <p:spPr>
           <a:xfrm>
-            <a:off x="841248" y="3877056"/>
-            <a:ext cx="5715000" cy="530352"/>
+            <a:off x="841248" y="3602736"/>
+            <a:ext cx="5138928" cy="786384"/>
           </a:xfrm>
           <a:prstGeom prst="roundRect">
             <a:avLst>
-              <a:gd name="adj" fmla="val 6000"/>
+              <a:gd name="adj" fmla="val 7000"/>
             </a:avLst>
           </a:prstGeom>
           <a:solidFill>
@@ -11327,9 +11464,55 @@
           </a:p>
         </p:txBody>
       </p:sp>
+      <p:sp>
+        <p:nvSpPr>
+          <p:cNvPr id="16" name="Rounded Rectangle 15"/>
+          <p:cNvSpPr/>
+          <p:nvPr/>
+        </p:nvSpPr>
+        <p:spPr>
+          <a:xfrm>
+            <a:off x="987552" y="3739896"/>
+            <a:ext cx="512064" cy="512064"/>
+          </a:xfrm>
+          <a:prstGeom prst="roundRect">
+            <a:avLst>
+              <a:gd name="adj" fmla="val 26000"/>
+            </a:avLst>
+          </a:prstGeom>
+          <a:solidFill>
+            <a:srgbClr val="EE0000"/>
+          </a:solidFill>
+          <a:ln>
+            <a:noFill/>
+          </a:ln>
+          <a:effectLst/>
+        </p:spPr>
+        <p:style>
+          <a:lnRef idx="1">
+            <a:schemeClr val="accent1"/>
+          </a:lnRef>
+          <a:fillRef idx="3">
+            <a:schemeClr val="accent1"/>
+          </a:fillRef>
+          <a:effectRef idx="2">
+            <a:schemeClr val="accent1"/>
+          </a:effectRef>
+          <a:fontRef idx="minor">
+            <a:schemeClr val="lt1"/>
+          </a:fontRef>
+        </p:style>
+        <p:txBody>
+          <a:bodyPr rtlCol="0" anchor="ctr"/>
+          <a:lstStyle/>
+          <a:p>
+            <a:pPr algn="ctr"/>
+          </a:p>
+        </p:txBody>
+      </p:sp>
       <p:pic>
         <p:nvPicPr>
-          <p:cNvPr id="14" name="Picture 13" descr="check_steel.png"/>
+          <p:cNvPr id="17" name="Picture 16" descr="check_white.png"/>
           <p:cNvPicPr>
             <a:picLocks noChangeAspect="1"/>
           </p:cNvPicPr>
@@ -11343,8 +11526,8 @@
         </p:blipFill>
         <p:spPr>
           <a:xfrm>
-            <a:off x="987552" y="4023360"/>
-            <a:ext cx="237744" cy="237744"/>
+            <a:off x="1110447" y="3862791"/>
+            <a:ext cx="266273" cy="266273"/>
           </a:xfrm>
           <a:prstGeom prst="rect">
             <a:avLst/>
@@ -11353,14 +11536,14 @@
       </p:pic>
       <p:sp>
         <p:nvSpPr>
-          <p:cNvPr id="15" name="TextBox 14"/>
+          <p:cNvPr id="18" name="TextBox 17"/>
           <p:cNvSpPr txBox="1"/>
           <p:nvPr/>
         </p:nvSpPr>
         <p:spPr>
           <a:xfrm>
-            <a:off x="1353312" y="3877056"/>
-            <a:ext cx="5029200" cy="530352"/>
+            <a:off x="1627632" y="3602736"/>
+            <a:ext cx="4206240" cy="786384"/>
           </a:xfrm>
           <a:prstGeom prst="rect">
             <a:avLst/>
@@ -11385,7 +11568,7 @@
               </a:spcAft>
             </a:pPr>
             <a:r>
-              <a:rPr sz="1200" b="0">
+              <a:rPr sz="1150" b="0">
                 <a:solidFill>
                   <a:srgbClr val="1A1A1A"/>
                 </a:solidFill>
@@ -11398,18 +11581,18 @@
       </p:sp>
       <p:sp>
         <p:nvSpPr>
-          <p:cNvPr id="16" name="Rounded Rectangle 15"/>
+          <p:cNvPr id="19" name="Rounded Rectangle 18"/>
           <p:cNvSpPr/>
           <p:nvPr/>
         </p:nvSpPr>
         <p:spPr>
           <a:xfrm>
-            <a:off x="841248" y="4480560"/>
-            <a:ext cx="5715000" cy="530352"/>
+            <a:off x="6254496" y="3602736"/>
+            <a:ext cx="5138928" cy="786384"/>
           </a:xfrm>
           <a:prstGeom prst="roundRect">
             <a:avLst>
-              <a:gd name="adj" fmla="val 6000"/>
+              <a:gd name="adj" fmla="val 7000"/>
             </a:avLst>
           </a:prstGeom>
           <a:solidFill>
@@ -11444,9 +11627,55 @@
           </a:p>
         </p:txBody>
       </p:sp>
+      <p:sp>
+        <p:nvSpPr>
+          <p:cNvPr id="20" name="Rounded Rectangle 19"/>
+          <p:cNvSpPr/>
+          <p:nvPr/>
+        </p:nvSpPr>
+        <p:spPr>
+          <a:xfrm>
+            <a:off x="6400800" y="3739896"/>
+            <a:ext cx="512064" cy="512064"/>
+          </a:xfrm>
+          <a:prstGeom prst="roundRect">
+            <a:avLst>
+              <a:gd name="adj" fmla="val 26000"/>
+            </a:avLst>
+          </a:prstGeom>
+          <a:solidFill>
+            <a:srgbClr val="EE0000"/>
+          </a:solidFill>
+          <a:ln>
+            <a:noFill/>
+          </a:ln>
+          <a:effectLst/>
+        </p:spPr>
+        <p:style>
+          <a:lnRef idx="1">
+            <a:schemeClr val="accent1"/>
+          </a:lnRef>
+          <a:fillRef idx="3">
+            <a:schemeClr val="accent1"/>
+          </a:fillRef>
+          <a:effectRef idx="2">
+            <a:schemeClr val="accent1"/>
+          </a:effectRef>
+          <a:fontRef idx="minor">
+            <a:schemeClr val="lt1"/>
+          </a:fontRef>
+        </p:style>
+        <p:txBody>
+          <a:bodyPr rtlCol="0" anchor="ctr"/>
+          <a:lstStyle/>
+          <a:p>
+            <a:pPr algn="ctr"/>
+          </a:p>
+        </p:txBody>
+      </p:sp>
       <p:pic>
         <p:nvPicPr>
-          <p:cNvPr id="17" name="Picture 16" descr="check_steel.png"/>
+          <p:cNvPr id="21" name="Picture 20" descr="check_white.png"/>
           <p:cNvPicPr>
             <a:picLocks noChangeAspect="1"/>
           </p:cNvPicPr>
@@ -11460,8 +11689,8 @@
         </p:blipFill>
         <p:spPr>
           <a:xfrm>
-            <a:off x="987552" y="4626864"/>
-            <a:ext cx="237744" cy="237744"/>
+            <a:off x="6523695" y="3862791"/>
+            <a:ext cx="266273" cy="266273"/>
           </a:xfrm>
           <a:prstGeom prst="rect">
             <a:avLst/>
@@ -11470,14 +11699,14 @@
       </p:pic>
       <p:sp>
         <p:nvSpPr>
-          <p:cNvPr id="18" name="TextBox 17"/>
+          <p:cNvPr id="22" name="TextBox 21"/>
           <p:cNvSpPr txBox="1"/>
           <p:nvPr/>
         </p:nvSpPr>
         <p:spPr>
           <a:xfrm>
-            <a:off x="1353312" y="4480560"/>
-            <a:ext cx="5029200" cy="530352"/>
+            <a:off x="7040880" y="3602736"/>
+            <a:ext cx="4206240" cy="786384"/>
           </a:xfrm>
           <a:prstGeom prst="rect">
             <a:avLst/>
@@ -11502,7 +11731,7 @@
               </a:spcAft>
             </a:pPr>
             <a:r>
-              <a:rPr sz="1200" b="0">
+              <a:rPr sz="1150" b="0">
                 <a:solidFill>
                   <a:srgbClr val="1A1A1A"/>
                 </a:solidFill>
@@ -11515,18 +11744,18 @@
       </p:sp>
       <p:sp>
         <p:nvSpPr>
-          <p:cNvPr id="19" name="Rounded Rectangle 18"/>
+          <p:cNvPr id="23" name="Rounded Rectangle 22"/>
           <p:cNvSpPr/>
           <p:nvPr/>
         </p:nvSpPr>
         <p:spPr>
           <a:xfrm>
-            <a:off x="841248" y="5084064"/>
-            <a:ext cx="5715000" cy="530352"/>
+            <a:off x="841248" y="4535424"/>
+            <a:ext cx="5138928" cy="786384"/>
           </a:xfrm>
           <a:prstGeom prst="roundRect">
             <a:avLst>
-              <a:gd name="adj" fmla="val 6000"/>
+              <a:gd name="adj" fmla="val 7000"/>
             </a:avLst>
           </a:prstGeom>
           <a:solidFill>
@@ -11561,9 +11790,55 @@
           </a:p>
         </p:txBody>
       </p:sp>
+      <p:sp>
+        <p:nvSpPr>
+          <p:cNvPr id="24" name="Rounded Rectangle 23"/>
+          <p:cNvSpPr/>
+          <p:nvPr/>
+        </p:nvSpPr>
+        <p:spPr>
+          <a:xfrm>
+            <a:off x="987552" y="4672584"/>
+            <a:ext cx="512064" cy="512064"/>
+          </a:xfrm>
+          <a:prstGeom prst="roundRect">
+            <a:avLst>
+              <a:gd name="adj" fmla="val 26000"/>
+            </a:avLst>
+          </a:prstGeom>
+          <a:solidFill>
+            <a:srgbClr val="EE0000"/>
+          </a:solidFill>
+          <a:ln>
+            <a:noFill/>
+          </a:ln>
+          <a:effectLst/>
+        </p:spPr>
+        <p:style>
+          <a:lnRef idx="1">
+            <a:schemeClr val="accent1"/>
+          </a:lnRef>
+          <a:fillRef idx="3">
+            <a:schemeClr val="accent1"/>
+          </a:fillRef>
+          <a:effectRef idx="2">
+            <a:schemeClr val="accent1"/>
+          </a:effectRef>
+          <a:fontRef idx="minor">
+            <a:schemeClr val="lt1"/>
+          </a:fontRef>
+        </p:style>
+        <p:txBody>
+          <a:bodyPr rtlCol="0" anchor="ctr"/>
+          <a:lstStyle/>
+          <a:p>
+            <a:pPr algn="ctr"/>
+          </a:p>
+        </p:txBody>
+      </p:sp>
       <p:pic>
         <p:nvPicPr>
-          <p:cNvPr id="20" name="Picture 19" descr="check_steel.png"/>
+          <p:cNvPr id="25" name="Picture 24" descr="check_white.png"/>
           <p:cNvPicPr>
             <a:picLocks noChangeAspect="1"/>
           </p:cNvPicPr>
@@ -11577,8 +11852,8 @@
         </p:blipFill>
         <p:spPr>
           <a:xfrm>
-            <a:off x="987552" y="5230368"/>
-            <a:ext cx="237744" cy="237744"/>
+            <a:off x="1110447" y="4795479"/>
+            <a:ext cx="266273" cy="266273"/>
           </a:xfrm>
           <a:prstGeom prst="rect">
             <a:avLst/>
@@ -11587,14 +11862,14 @@
       </p:pic>
       <p:sp>
         <p:nvSpPr>
-          <p:cNvPr id="21" name="TextBox 20"/>
+          <p:cNvPr id="26" name="TextBox 25"/>
           <p:cNvSpPr txBox="1"/>
           <p:nvPr/>
         </p:nvSpPr>
         <p:spPr>
           <a:xfrm>
-            <a:off x="1353312" y="5084064"/>
-            <a:ext cx="5029200" cy="530352"/>
+            <a:off x="1627632" y="4535424"/>
+            <a:ext cx="4206240" cy="786384"/>
           </a:xfrm>
           <a:prstGeom prst="rect">
             <a:avLst/>
@@ -11619,7 +11894,7 @@
               </a:spcAft>
             </a:pPr>
             <a:r>
-              <a:rPr sz="1200" b="0">
+              <a:rPr sz="1150" b="0">
                 <a:solidFill>
                   <a:srgbClr val="1A1A1A"/>
                 </a:solidFill>
@@ -11630,16 +11905,310 @@
           </a:p>
         </p:txBody>
       </p:sp>
-      <p:sp>
-        <p:nvSpPr>
-          <p:cNvPr id="22" name="Rounded Rectangle 21"/>
+      <p:cxnSp>
+        <p:nvCxnSpPr>
+          <p:cNvPr id="27" name="Connector 26"/>
+          <p:cNvCxnSpPr/>
+          <p:nvPr/>
+        </p:nvCxnSpPr>
+        <p:spPr>
+          <a:xfrm>
+            <a:off x="841248" y="6437376"/>
+            <a:ext cx="10509199" cy="0"/>
+          </a:xfrm>
+          <a:prstGeom prst="bentConnector3">
+            <a:avLst/>
+          </a:prstGeom>
+          <a:ln w="12700">
+            <a:solidFill>
+              <a:srgbClr val="DDE1E6"/>
+            </a:solidFill>
+          </a:ln>
+          <a:effectLst/>
+        </p:spPr>
+        <p:style>
+          <a:lnRef idx="2">
+            <a:schemeClr val="accent1"/>
+          </a:lnRef>
+          <a:fillRef idx="0">
+            <a:schemeClr val="accent1"/>
+          </a:fillRef>
+          <a:effectRef idx="1">
+            <a:schemeClr val="accent1"/>
+          </a:effectRef>
+          <a:fontRef idx="minor">
+            <a:schemeClr val="tx1"/>
+          </a:fontRef>
+        </p:style>
+      </p:cxnSp>
+      <p:sp>
+        <p:nvSpPr>
+          <p:cNvPr id="28" name="TextBox 27"/>
+          <p:cNvSpPr txBox="1"/>
+          <p:nvPr/>
+        </p:nvSpPr>
+        <p:spPr>
+          <a:xfrm>
+            <a:off x="841248" y="6473952"/>
+            <a:ext cx="7315200" cy="274320"/>
+          </a:xfrm>
+          <a:prstGeom prst="rect">
+            <a:avLst/>
+          </a:prstGeom>
+          <a:noFill/>
+        </p:spPr>
+        <p:txBody>
+          <a:bodyPr wrap="square" anchor="t" lIns="0" rIns="0" tIns="0" bIns="0">
+            <a:spAutoFit/>
+          </a:bodyPr>
+          <a:lstStyle/>
+          <a:p>
+            <a:pPr algn="l">
+              <a:lnSpc>
+                <a:spcPct val="106000"/>
+              </a:lnSpc>
+              <a:spcBef>
+                <a:spcPts val="0"/>
+              </a:spcBef>
+              <a:spcAft>
+                <a:spcPts val="0"/>
+              </a:spcAft>
+            </a:pPr>
+            <a:r>
+              <a:rPr sz="950" b="0">
+                <a:solidFill>
+                  <a:srgbClr val="8A9099"/>
+                </a:solidFill>
+                <a:latin typeface="Red Hat Text"/>
+              </a:rPr>
+              <a:t>CONFIDENTIAL</a:t>
+            </a:r>
+          </a:p>
+        </p:txBody>
+      </p:sp>
+      <p:sp>
+        <p:nvSpPr>
+          <p:cNvPr id="29" name="TextBox 28"/>
+          <p:cNvSpPr txBox="1"/>
+          <p:nvPr/>
+        </p:nvSpPr>
+        <p:spPr>
+          <a:xfrm>
+            <a:off x="10801807" y="6473952"/>
+            <a:ext cx="548640" cy="274320"/>
+          </a:xfrm>
+          <a:prstGeom prst="rect">
+            <a:avLst/>
+          </a:prstGeom>
+          <a:noFill/>
+        </p:spPr>
+        <p:txBody>
+          <a:bodyPr wrap="square" anchor="t" lIns="0" rIns="0" tIns="0" bIns="0">
+            <a:spAutoFit/>
+          </a:bodyPr>
+          <a:lstStyle/>
+          <a:p>
+            <a:pPr algn="r">
+              <a:lnSpc>
+                <a:spcPct val="106000"/>
+              </a:lnSpc>
+              <a:spcBef>
+                <a:spcPts val="0"/>
+              </a:spcBef>
+              <a:spcAft>
+                <a:spcPts val="0"/>
+              </a:spcAft>
+            </a:pPr>
+            <a:r>
+              <a:rPr sz="950" b="0">
+                <a:solidFill>
+                  <a:srgbClr val="8A9099"/>
+                </a:solidFill>
+                <a:latin typeface="Red Hat Text"/>
+              </a:rPr>
+              <a:t>7</a:t>
+            </a:r>
+          </a:p>
+        </p:txBody>
+      </p:sp>
+    </p:spTree>
+  </p:cSld>
+  <p:clrMapOvr>
+    <a:masterClrMapping/>
+  </p:clrMapOvr>
+</p:sld>
+</file>
+
+<file path=ppt/slides/slide9.xml><?xml version="1.0" encoding="utf-8"?>
+<p:sld xmlns:a="http://schemas.openxmlformats.org/drawingml/2006/main" xmlns:p="http://schemas.openxmlformats.org/presentationml/2006/main" xmlns:r="http://schemas.openxmlformats.org/officeDocument/2006/relationships">
+  <p:cSld>
+    <p:spTree>
+      <p:nvGrpSpPr>
+        <p:cNvPr id="1" name=""/>
+        <p:cNvGrpSpPr/>
+        <p:nvPr/>
+      </p:nvGrpSpPr>
+      <p:grpSpPr/>
+      <p:pic>
+        <p:nvPicPr>
+          <p:cNvPr id="2" name="Picture 1" descr="redhat_logo.jpg"/>
+          <p:cNvPicPr>
+            <a:picLocks noChangeAspect="1"/>
+          </p:cNvPicPr>
+          <p:nvPr/>
+        </p:nvPicPr>
+        <p:blipFill>
+          <a:blip r:embed="rId2"/>
+          <a:stretch>
+            <a:fillRect/>
+          </a:stretch>
+        </p:blipFill>
+        <p:spPr>
+          <a:xfrm>
+            <a:off x="10326319" y="475488"/>
+            <a:ext cx="1024128" cy="242248"/>
+          </a:xfrm>
+          <a:prstGeom prst="rect">
+            <a:avLst/>
+          </a:prstGeom>
+        </p:spPr>
+      </p:pic>
+      <p:sp>
+        <p:nvSpPr>
+          <p:cNvPr id="3" name="TextBox 2"/>
+          <p:cNvSpPr txBox="1"/>
+          <p:nvPr/>
+        </p:nvSpPr>
+        <p:spPr>
+          <a:xfrm>
+            <a:off x="841248" y="548640"/>
+            <a:ext cx="8595360" cy="274320"/>
+          </a:xfrm>
+          <a:prstGeom prst="rect">
+            <a:avLst/>
+          </a:prstGeom>
+          <a:noFill/>
+        </p:spPr>
+        <p:txBody>
+          <a:bodyPr wrap="square" anchor="t" lIns="0" rIns="0" tIns="0" bIns="0">
+            <a:spAutoFit/>
+          </a:bodyPr>
+          <a:lstStyle/>
+          <a:p>
+            <a:pPr algn="l">
+              <a:lnSpc>
+                <a:spcPct val="106000"/>
+              </a:lnSpc>
+              <a:spcBef>
+                <a:spcPts val="0"/>
+              </a:spcBef>
+              <a:spcAft>
+                <a:spcPts val="0"/>
+              </a:spcAft>
+            </a:pPr>
+            <a:r>
+              <a:rPr sz="1250" b="1" spc="220">
+                <a:solidFill>
+                  <a:srgbClr val="EE0000"/>
+                </a:solidFill>
+                <a:latin typeface="Red Hat Display"/>
+              </a:rPr>
+              <a:t>M20 · SERVERLESS ZERO-TO-HERO</a:t>
+            </a:r>
+          </a:p>
+        </p:txBody>
+      </p:sp>
+      <p:sp>
+        <p:nvSpPr>
+          <p:cNvPr id="4" name="TextBox 3"/>
+          <p:cNvSpPr txBox="1"/>
+          <p:nvPr/>
+        </p:nvSpPr>
+        <p:spPr>
+          <a:xfrm>
+            <a:off x="841248" y="877824"/>
+            <a:ext cx="10515600" cy="548640"/>
+          </a:xfrm>
+          <a:prstGeom prst="rect">
+            <a:avLst/>
+          </a:prstGeom>
+          <a:noFill/>
+        </p:spPr>
+        <p:txBody>
+          <a:bodyPr wrap="none" anchor="t" lIns="0" rIns="0" tIns="0" bIns="0">
+            <a:spAutoFit/>
+          </a:bodyPr>
+          <a:lstStyle/>
+          <a:p>
+            <a:pPr algn="l">
+              <a:lnSpc>
+                <a:spcPct val="100000"/>
+              </a:lnSpc>
+              <a:spcBef>
+                <a:spcPts val="0"/>
+              </a:spcBef>
+              <a:spcAft>
+                <a:spcPts val="0"/>
+              </a:spcAft>
+            </a:pPr>
+            <a:r>
+              <a:rPr sz="2500" b="1">
+                <a:solidFill>
+                  <a:srgbClr val="1A1A1A"/>
+                </a:solidFill>
+                <a:latin typeface="Red Hat Display"/>
+              </a:rPr>
+              <a:t>What you built</a:t>
+            </a:r>
+          </a:p>
+        </p:txBody>
+      </p:sp>
+      <p:cxnSp>
+        <p:nvCxnSpPr>
+          <p:cNvPr id="5" name="Connector 4"/>
+          <p:cNvCxnSpPr/>
+          <p:nvPr/>
+        </p:nvCxnSpPr>
+        <p:spPr>
+          <a:xfrm>
+            <a:off x="841248" y="1554480"/>
+            <a:ext cx="1371600" cy="0"/>
+          </a:xfrm>
+          <a:prstGeom prst="bentConnector3">
+            <a:avLst/>
+          </a:prstGeom>
+          <a:ln w="31750">
+            <a:solidFill>
+              <a:srgbClr val="EE0000"/>
+            </a:solidFill>
+          </a:ln>
+          <a:effectLst/>
+        </p:spPr>
+        <p:style>
+          <a:lnRef idx="2">
+            <a:schemeClr val="accent1"/>
+          </a:lnRef>
+          <a:fillRef idx="0">
+            <a:schemeClr val="accent1"/>
+          </a:fillRef>
+          <a:effectRef idx="1">
+            <a:schemeClr val="accent1"/>
+          </a:effectRef>
+          <a:fontRef idx="minor">
+            <a:schemeClr val="tx1"/>
+          </a:fontRef>
+        </p:style>
+      </p:cxnSp>
+      <p:sp>
+        <p:nvSpPr>
+          <p:cNvPr id="6" name="Rounded Rectangle 5"/>
           <p:cNvSpPr/>
           <p:nvPr/>
         </p:nvSpPr>
         <p:spPr>
           <a:xfrm>
-            <a:off x="6812280" y="2670048"/>
-            <a:ext cx="4538167" cy="2944368"/>
+            <a:off x="841248" y="2331720"/>
+            <a:ext cx="10509199" cy="3794760"/>
           </a:xfrm>
           <a:prstGeom prst="roundRect">
             <a:avLst>
@@ -11678,169 +12247,33 @@
           </a:p>
         </p:txBody>
       </p:sp>
-      <p:sp>
-        <p:nvSpPr>
-          <p:cNvPr id="23" name="Rounded Rectangle 22"/>
-          <p:cNvSpPr/>
-          <p:nvPr/>
-        </p:nvSpPr>
-        <p:spPr>
-          <a:xfrm>
-            <a:off x="7013448" y="2871216"/>
-            <a:ext cx="1298448" cy="310896"/>
-          </a:xfrm>
-          <a:prstGeom prst="roundRect">
-            <a:avLst>
-              <a:gd name="adj" fmla="val 50000"/>
-            </a:avLst>
-          </a:prstGeom>
-          <a:solidFill>
-            <a:srgbClr val="FCECEC"/>
-          </a:solidFill>
-          <a:ln>
-            <a:noFill/>
-          </a:ln>
-          <a:effectLst/>
-        </p:spPr>
-        <p:style>
-          <a:lnRef idx="1">
-            <a:schemeClr val="accent1"/>
-          </a:lnRef>
-          <a:fillRef idx="3">
-            <a:schemeClr val="accent1"/>
-          </a:fillRef>
-          <a:effectRef idx="2">
-            <a:schemeClr val="accent1"/>
-          </a:effectRef>
-          <a:fontRef idx="minor">
-            <a:schemeClr val="lt1"/>
-          </a:fontRef>
-        </p:style>
-        <p:txBody>
-          <a:bodyPr rtlCol="0" anchor="ctr"/>
-          <a:lstStyle/>
-          <a:p>
-            <a:pPr algn="ctr"/>
-          </a:p>
-        </p:txBody>
-      </p:sp>
-      <p:sp>
-        <p:nvSpPr>
-          <p:cNvPr id="24" name="TextBox 23"/>
-          <p:cNvSpPr txBox="1"/>
-          <p:nvPr/>
-        </p:nvSpPr>
-        <p:spPr>
-          <a:xfrm>
-            <a:off x="7013448" y="2871216"/>
-            <a:ext cx="1298448" cy="310896"/>
-          </a:xfrm>
-          <a:prstGeom prst="rect">
-            <a:avLst/>
-          </a:prstGeom>
-          <a:noFill/>
-        </p:spPr>
-        <p:txBody>
-          <a:bodyPr wrap="none" anchor="ctr" lIns="0" rIns="0" tIns="0" bIns="0">
-            <a:spAutoFit/>
-          </a:bodyPr>
-          <a:lstStyle/>
-          <a:p>
-            <a:pPr algn="ctr">
-              <a:lnSpc>
-                <a:spcPct val="106000"/>
-              </a:lnSpc>
-              <a:spcBef>
-                <a:spcPts val="0"/>
-              </a:spcBef>
-              <a:spcAft>
-                <a:spcPts val="0"/>
-              </a:spcAft>
-            </a:pPr>
-            <a:r>
-              <a:rPr sz="850" b="1">
-                <a:solidFill>
-                  <a:srgbClr val="B80000"/>
-                </a:solidFill>
-                <a:latin typeface="Red Hat Display"/>
-              </a:rPr>
-              <a:t>MEDIA PASS</a:t>
-            </a:r>
-          </a:p>
-        </p:txBody>
-      </p:sp>
       <p:pic>
         <p:nvPicPr>
-          <p:cNvPr id="25" name="Picture 24" descr="eye_slate.png"/>
+          <p:cNvPr id="7" name="Picture 6" descr="03-what-you-built.png"/>
           <p:cNvPicPr>
             <a:picLocks noChangeAspect="1"/>
           </p:cNvPicPr>
           <p:nvPr/>
         </p:nvPicPr>
         <p:blipFill>
-          <a:blip r:embed="rId4"/>
+          <a:blip r:embed="rId3"/>
           <a:stretch>
             <a:fillRect/>
           </a:stretch>
         </p:blipFill>
         <p:spPr>
           <a:xfrm>
-            <a:off x="8843619" y="3383280"/>
-            <a:ext cx="475488" cy="475488"/>
+            <a:off x="4032015" y="2532888"/>
+            <a:ext cx="4127664" cy="3392424"/>
           </a:xfrm>
           <a:prstGeom prst="rect">
             <a:avLst/>
           </a:prstGeom>
         </p:spPr>
       </p:pic>
-      <p:sp>
-        <p:nvSpPr>
-          <p:cNvPr id="26" name="TextBox 25"/>
-          <p:cNvSpPr txBox="1"/>
-          <p:nvPr/>
-        </p:nvSpPr>
-        <p:spPr>
-          <a:xfrm>
-            <a:off x="7050024" y="3995928"/>
-            <a:ext cx="4062679" cy="1481328"/>
-          </a:xfrm>
-          <a:prstGeom prst="rect">
-            <a:avLst/>
-          </a:prstGeom>
-          <a:noFill/>
-        </p:spPr>
-        <p:txBody>
-          <a:bodyPr wrap="square" anchor="t" lIns="0" rIns="0" tIns="0" bIns="0">
-            <a:spAutoFit/>
-          </a:bodyPr>
-          <a:lstStyle/>
-          <a:p>
-            <a:pPr algn="l">
-              <a:lnSpc>
-                <a:spcPct val="120000"/>
-              </a:lnSpc>
-              <a:spcBef>
-                <a:spcPts val="0"/>
-              </a:spcBef>
-              <a:spcAft>
-                <a:spcPts val="0"/>
-              </a:spcAft>
-            </a:pPr>
-            <a:r>
-              <a:rPr sz="950" b="0">
-                <a:solidFill>
-                  <a:srgbClr val="8A9099"/>
-                </a:solidFill>
-                <a:latin typeface="Red Hat Text"/>
-              </a:rPr>
-              <a:t>A two-column decision matrix (Lean serverless | Lean Deployment) across five rows (traffic shape, latency budget, invocation, rollout need, cost model), with a footnote pointer to Eventing (eventing depth + SonataFlow workflows) and Jobs, Batch &amp; Queued Workloads (batch/Jobs) for "not this tool."</a:t>
-            </a:r>
-          </a:p>
-        </p:txBody>
-      </p:sp>
       <p:cxnSp>
         <p:nvCxnSpPr>
-          <p:cNvPr id="27" name="Connector 26"/>
+          <p:cNvPr id="8" name="Connector 7"/>
           <p:cNvCxnSpPr/>
           <p:nvPr/>
         </p:nvCxnSpPr>
@@ -11876,7 +12309,7 @@
       </p:cxnSp>
       <p:sp>
         <p:nvSpPr>
-          <p:cNvPr id="28" name="TextBox 27"/>
+          <p:cNvPr id="9" name="TextBox 8"/>
           <p:cNvSpPr txBox="1"/>
           <p:nvPr/>
         </p:nvSpPr>
@@ -11921,7 +12354,7 @@
       </p:sp>
       <p:sp>
         <p:nvSpPr>
-          <p:cNvPr id="29" name="TextBox 28"/>
+          <p:cNvPr id="10" name="TextBox 9"/>
           <p:cNvSpPr txBox="1"/>
           <p:nvPr/>
         </p:nvSpPr>
@@ -11959,7 +12392,7 @@
                 </a:solidFill>
                 <a:latin typeface="Red Hat Text"/>
               </a:rPr>
-              <a:t>7</a:t>
+              <a:t>8</a:t>
             </a:r>
           </a:p>
         </p:txBody>
